--- a/slaydlar/M6.pptx
+++ b/slaydlar/M6.pptx
@@ -23,6 +23,7 @@
     <p:sldId id="271" r:id="rId23"/>
     <p:sldId id="272" r:id="rId24"/>
     <p:sldId id="273" r:id="rId25"/>
+    <p:sldId id="274" r:id="rId26"/>
   </p:sldIdLst>
   <p:sldSz cx="12192000" cy="6858000" type="screen4x3"/>
   <p:notesSz cx="6858000" cy="9144000"/>
@@ -847,13 +848,25 @@
           <a:lstStyle/>
           <a:p>
             <a:r>
-              <a:t>Chekka qurilma uchun model tayyorlash odatda uch bosqichdan iborat. Birinchi — formatga o'tkazish: PyTorch → ONNX (torch.onnx.export) → ONNX Runtime (Jetson'da CUDA/TensorRT execution provider bilan) yoki TensorRT dvigateli; TensorFlow/Keras → TensorFlow Lite (2024 yildan boshlab LiteRT nomi bilan) → Edge TPU kompilyatori yoki TFLM. Ikkinchi — kvantlash (quantization): FP32 og'irliklarni INT8'ga (ba'zan FP16'ga) o'tkazish, bu modelni 4 marta kichraytiradi va INT8 tezlatkichlarni ishlatish imkonini beradi; o'qitishdan keyingi statik kvantlash (post-training static quantization) uchun 100–500 ta vakillik namuna (calibration dataset) kerak, aniqlik yo'qotilishi odatda 0,5–2 foiz punkt; qiyin holatlarda kvantlashni hisobga olgan o'qitish (quantization-aware training, QAT) qo'llaniladi. Uchinchi — delegat yoki execution provider tanlash: tflite'da GPU delegate, NNAPI/QNN delegate, Edge TPU delegate; ONNX Runtime'da CPU, CUDA, TensorRT, OpenVINO, QNN provayderlari. Delegat grafning qaysi qismini qaysi apparatda bajarishni hal qiladi.</a:t>
+              <a:t>NVIDIA Jetson — Arm protsessor, Ampere arxitekturali GPU (Tensor Core bilan), apparat video kodek va ixtiyoriy DLA (Deep Learning Accelerator) bloklarini bitta modulda birlashtirgan tizim-modul (system-on-module). Orin avlodi ko'rsatkichlari (zich INT8, Tensor Core, ishlab chiqaruvchi ma'lumotlari, taxminiy):</a:t>
             </a:r>
           </a:p>
           <a:p/>
           <a:p>
             <a:r>
-              <a:t>M8 mavzusida kvantlash va boshqa siqish usullari nazariy jihatdan chuqurroq ko'riladi; bu yerda ular chekka joylash kontekstida amaliy vosita sifatida ishlatiladi.</a:t>
+              <a:t>Jetson'ning asosiy afzalligi — to'liq CUDA ekotizimi: ma'lumot markazida ishlatiladigan PyTorch, TensorRT, cuDNN, DeepStream, Triton Inference Server bevosita ishlaydi, shuning uchun bulutdan chekkaga ko'chish nisbatan oson. DLA bloklari esa INT8/FP16 konvolyutsion tarmoqlarni GPU'dan kamroq quvvat bilan bajaradi va GPU'ni boshqa vazifalarga bo'shatadi. JetPack SDK (Ubuntu asosida) barcha drayverlar va kutubxonalarni o'z ichiga oladi. Kamchiliklari: narx (modul 250–2000 dollar oralig'ida), boshqa chekka chiplarga nisbatan yuqori quvvat, va Arm'da ba'zi Python paketlarini qurish qiyinligi.</a:t>
+            </a:r>
+          </a:p>
+          <a:p/>
+          <a:p>
+            <a:r>
+              <a:t>Google Edge TPU (Coral mahsulot oilasi) — mutlaqo boshqa falsafa: faqat INT8, faqat TensorFlow Lite formatidagi va maxsus kompilyator (edgetpu_compiler) orqali o'tkazilgan modellar; 4 TOPS (INT8) unumdorlik atigi ~2 Vt (0,5 Vt/TOPS) iste'molda; USB stik, M.2/PCIe modul yoki Dev Board ko'rinishida. Edge TPU sistolik massiv (systolic array) arxitekturasida qurilgan: ma'lumot massiv bo'ylab oqadi, har bir element ko'paytirish-qo'shish bajaradi va natijani qo'shnisiga uzatadi — xotiraga murojaat minimal, energiya samaradorligi maksimal (M4 va M5 mavzularidagi ma'lumot harakati tamoyilining amaliy ifodasi). Cheklovlar: faqat qo'llab-quvvatlanadigan operatsiyalar TPU'da bajariladi, qolganlari CPU'ga qaytadi (va grafda birinchi qo'llab-quvvatlanmagan operatsiyadan keyingi barchasi CPU'da qoladi); model parametrlari uchun ~8 MB chip ichi keshi bor, kattaroq modellar og'irliklarni oqim bilan yuklaydi va sekinlashadi; FP16 yoki dinamik shakllar yo'q. Shuni ham qayd etish kerakki, Coral qatori so'nggi yillarda sekin yangilanmoqda, shuning uchun yangi loyihalarda muqobil NPU'lar (Hailo-8, Qualcomm, Rockchip NPU, Intel NPU) ham ko'rib chiqiladi.</a:t>
+            </a:r>
+          </a:p>
+          <a:p/>
+          <a:p>
+            <a:r>
+              <a:t>Mobil telefonlarda NPU — Apple Neural Engine, Qualcomm Hexagon, Samsung/Google tensor bloklari — o'nlab TOPS beradi; ularga kirish Core ML, Android NNAPI (hozir asta-sekin LiteRT delegatlari va vendor SDK'lar bilan almashtirilmoqda), Qualcomm QNN orqali amalga oshiriladi.</a:t>
             </a:r>
           </a:p>
         </p:txBody>
@@ -879,6 +892,82 @@
 </file>
 
 <file path=ppt/notesSlides/notesSlide6.xml><?xml version="1.0" encoding="utf-8"?>
+<p:notes xmlns:a="http://schemas.openxmlformats.org/drawingml/2006/main" xmlns:p="http://schemas.openxmlformats.org/presentationml/2006/main" xmlns:r="http://schemas.openxmlformats.org/officeDocument/2006/relationships">
+  <p:cSld>
+    <p:spTree>
+      <p:nvGrpSpPr>
+        <p:cNvPr id="1" name=""/>
+        <p:cNvGrpSpPr/>
+        <p:nvPr/>
+      </p:nvGrpSpPr>
+      <p:grpSpPr>
+        <a:xfrm>
+          <a:off x="0" y="0"/>
+          <a:ext cx="0" cy="0"/>
+          <a:chOff x="0" y="0"/>
+          <a:chExt cx="0" cy="0"/>
+        </a:xfrm>
+      </p:grpSpPr>
+      <p:sp>
+        <p:nvSpPr>
+          <p:cNvPr id="2" name="Slide Image Placeholder 1"/>
+          <p:cNvSpPr>
+            <a:spLocks noGrp="1"/>
+          </p:cNvSpPr>
+          <p:nvPr>
+            <p:ph type="sldImg" idx="2"/>
+          </p:nvPr>
+        </p:nvSpPr>
+        <p:spPr/>
+      </p:sp>
+      <p:sp>
+        <p:nvSpPr>
+          <p:cNvPr id="3" name="Notes Placeholder 2"/>
+          <p:cNvSpPr>
+            <a:spLocks noGrp="1"/>
+          </p:cNvSpPr>
+          <p:nvPr>
+            <p:ph type="body" idx="3" sz="quarter"/>
+          </p:nvPr>
+        </p:nvSpPr>
+        <p:spPr/>
+        <p:txBody>
+          <a:bodyPr/>
+          <a:lstStyle/>
+          <a:p>
+            <a:r>
+              <a:t>Chekka qurilma uchun model tayyorlash odatda uch bosqichdan iborat. Birinchi — formatga o'tkazish: PyTorch → ONNX (torch.onnx.export) → ONNX Runtime (Jetson'da CUDA/TensorRT execution provider bilan) yoki TensorRT dvigateli; TensorFlow/Keras → TensorFlow Lite (2024 yildan boshlab LiteRT nomi bilan) → Edge TPU kompilyatori yoki TFLM. Ikkinchi — kvantlash (quantization): FP32 og'irliklarni INT8'ga (ba'zan FP16'ga) o'tkazish, bu modelni 4 marta kichraytiradi va INT8 tezlatkichlarni ishlatish imkonini beradi; o'qitishdan keyingi statik kvantlash (post-training static quantization) uchun 100–500 ta vakillik namuna (calibration dataset) kerak, aniqlik yo'qotilishi odatda 0,5–2 foiz punkt; qiyin holatlarda kvantlashni hisobga olgan o'qitish (quantization-aware training, QAT) qo'llaniladi. Uchinchi — delegat yoki execution provider tanlash: tflite'da GPU delegate, NNAPI/QNN delegate, Edge TPU delegate; ONNX Runtime'da CPU, CUDA, TensorRT, OpenVINO, QNN provayderlari. Delegat grafning qaysi qismini qaysi apparatda bajarishni hal qiladi.</a:t>
+            </a:r>
+          </a:p>
+          <a:p/>
+          <a:p>
+            <a:r>
+              <a:t>M8 mavzusida kvantlash va boshqa siqish usullari nazariy jihatdan chuqurroq ko'riladi; bu yerda ular chekka joylash kontekstida amaliy vosita sifatida ishlatiladi.</a:t>
+            </a:r>
+          </a:p>
+        </p:txBody>
+      </p:sp>
+      <p:sp>
+        <p:nvSpPr>
+          <p:cNvPr id="4" name="Slide Number Placeholder 3"/>
+          <p:cNvSpPr>
+            <a:spLocks noGrp="1"/>
+          </p:cNvSpPr>
+          <p:nvPr>
+            <p:ph type="sldNum" idx="5" sz="quarter"/>
+          </p:nvPr>
+        </p:nvSpPr>
+        <p:spPr/>
+      </p:sp>
+    </p:spTree>
+  </p:cSld>
+  <p:clrMapOvr>
+    <a:masterClrMapping/>
+  </p:clrMapOvr>
+</p:notes>
+</file>
+
+<file path=ppt/notesSlides/notesSlide7.xml><?xml version="1.0" encoding="utf-8"?>
 <p:notes xmlns:a="http://schemas.openxmlformats.org/drawingml/2006/main" xmlns:p="http://schemas.openxmlformats.org/presentationml/2006/main" xmlns:r="http://schemas.openxmlformats.org/officeDocument/2006/relationships">
   <p:cSld>
     <p:spTree>
@@ -6643,12 +6732,12 @@
         </p:nvSpPr>
         <p:spPr>
           <a:xfrm>
-            <a:off x="550000" y="1300000"/>
-            <a:ext cx="11100000" cy="1147500"/>
+            <a:off x="550000" y="1409780"/>
+            <a:ext cx="11100000" cy="1503480"/>
           </a:xfrm>
           <a:prstGeom prst="roundRect">
             <a:avLst>
-              <a:gd name="adj" fmla="val 18000"/>
+              <a:gd name="adj" fmla="val 8000"/>
             </a:avLst>
           </a:prstGeom>
           <a:solidFill>
@@ -6689,8 +6778,8 @@
         </p:nvSpPr>
         <p:spPr>
           <a:xfrm>
-            <a:off x="550000" y="1300000"/>
-            <a:ext cx="70000" cy="1147500"/>
+            <a:off x="550000" y="1409780"/>
+            <a:ext cx="70000" cy="1503480"/>
           </a:xfrm>
           <a:prstGeom prst="rect">
             <a:avLst/>
@@ -6733,8 +6822,8 @@
         </p:nvSpPr>
         <p:spPr>
           <a:xfrm>
-            <a:off x="800000" y="1643750"/>
-            <a:ext cx="460000" cy="460000"/>
+            <a:off x="780000" y="1951520"/>
+            <a:ext cx="420000" cy="420000"/>
           </a:xfrm>
           <a:prstGeom prst="ellipse">
             <a:avLst/>
@@ -6767,7 +6856,7 @@
           <a:p>
             <a:pPr algn="ctr"/>
             <a:r>
-              <a:rPr sz="1600" b="1">
+              <a:rPr sz="1400" b="1">
                 <a:solidFill>
                   <a:srgbClr val="FFFFFF"/>
                 </a:solidFill>
@@ -6786,8 +6875,8 @@
         </p:nvSpPr>
         <p:spPr>
           <a:xfrm>
-            <a:off x="1450000" y="1300000"/>
-            <a:ext cx="10050000" cy="1147500"/>
+            <a:off x="1380000" y="1449780"/>
+            <a:ext cx="10150000" cy="1423480"/>
           </a:xfrm>
           <a:prstGeom prst="rect">
             <a:avLst/>
@@ -6795,20 +6884,35 @@
           <a:noFill/>
         </p:spPr>
         <p:txBody>
-          <a:bodyPr wrap="square" anchor="ctr" lIns="50800" rIns="50800">
+          <a:bodyPr wrap="square" anchor="ctr">
             <a:spAutoFit/>
           </a:bodyPr>
           <a:lstStyle/>
           <a:p>
-            <a:pPr algn="l"/>
             <a:r>
-              <a:rPr sz="1400" b="0">
+              <a:rPr sz="1500" b="1">
                 <a:solidFill>
-                  <a:srgbClr val="1B2430"/>
+                  <a:srgbClr val="1F3A5F"/>
                 </a:solidFill>
                 <a:latin typeface="Calibri"/>
               </a:rPr>
-              <a:t>NVIDIA Jetson — Arm protsessor, Ampere arxitekturali GPU (Tensor Core bilan), apparat video kodek va ixtiyoriy DLA (Deep Learning Accelerator) bloklarini bitta modulda birlashtirgan…</a:t>
+              <a:t>NVIDIA Jetson — Arm protsessor, Ampere arxitekturali GPU (Tensor Core bilan), apparat video kodek va ixtiyoriy DLA (Deep Learning Accelerator) bloklarini bitta modulda birlashtirgan tizim-modul (system-on-module).</a:t>
+            </a:r>
+          </a:p>
+          <a:p>
+            <a:pPr>
+              <a:spcBef>
+                <a:spcPts val="400"/>
+              </a:spcBef>
+            </a:pPr>
+            <a:r>
+              <a:rPr sz="1400">
+                <a:solidFill>
+                  <a:srgbClr val="334055"/>
+                </a:solidFill>
+                <a:latin typeface="Calibri"/>
+              </a:rPr>
+              <a:t>Orin avlodi ko'rsatkichlari (zich INT8, Tensor Core, ishlab chiqaruvchi ma'lumotlari, taxminiy):</a:t>
             </a:r>
           </a:p>
         </p:txBody>
@@ -6821,12 +6925,12 @@
         </p:nvSpPr>
         <p:spPr>
           <a:xfrm>
-            <a:off x="550000" y="2567500"/>
-            <a:ext cx="11100000" cy="1147500"/>
+            <a:off x="550000" y="3023260"/>
+            <a:ext cx="11100000" cy="1503480"/>
           </a:xfrm>
           <a:prstGeom prst="roundRect">
             <a:avLst>
-              <a:gd name="adj" fmla="val 18000"/>
+              <a:gd name="adj" fmla="val 8000"/>
             </a:avLst>
           </a:prstGeom>
           <a:solidFill>
@@ -6867,8 +6971,8 @@
         </p:nvSpPr>
         <p:spPr>
           <a:xfrm>
-            <a:off x="550000" y="2567500"/>
-            <a:ext cx="70000" cy="1147500"/>
+            <a:off x="550000" y="3023260"/>
+            <a:ext cx="70000" cy="1503480"/>
           </a:xfrm>
           <a:prstGeom prst="rect">
             <a:avLst/>
@@ -6911,8 +7015,8 @@
         </p:nvSpPr>
         <p:spPr>
           <a:xfrm>
-            <a:off x="800000" y="2911250"/>
-            <a:ext cx="460000" cy="460000"/>
+            <a:off x="780000" y="3565000"/>
+            <a:ext cx="420000" cy="420000"/>
           </a:xfrm>
           <a:prstGeom prst="ellipse">
             <a:avLst/>
@@ -6945,7 +7049,7 @@
           <a:p>
             <a:pPr algn="ctr"/>
             <a:r>
-              <a:rPr sz="1600" b="1">
+              <a:rPr sz="1400" b="1">
                 <a:solidFill>
                   <a:srgbClr val="FFFFFF"/>
                 </a:solidFill>
@@ -6964,8 +7068,8 @@
         </p:nvSpPr>
         <p:spPr>
           <a:xfrm>
-            <a:off x="1450000" y="2567500"/>
-            <a:ext cx="10050000" cy="1147500"/>
+            <a:off x="1380000" y="3063260"/>
+            <a:ext cx="10150000" cy="1423480"/>
           </a:xfrm>
           <a:prstGeom prst="rect">
             <a:avLst/>
@@ -6973,20 +7077,35 @@
           <a:noFill/>
         </p:spPr>
         <p:txBody>
-          <a:bodyPr wrap="square" anchor="ctr" lIns="50800" rIns="50800">
+          <a:bodyPr wrap="square" anchor="ctr">
             <a:spAutoFit/>
           </a:bodyPr>
           <a:lstStyle/>
           <a:p>
-            <a:pPr algn="l"/>
             <a:r>
-              <a:rPr sz="1400" b="0">
+              <a:rPr sz="1500" b="1">
                 <a:solidFill>
-                  <a:srgbClr val="1B2430"/>
+                  <a:srgbClr val="1F3A5F"/>
                 </a:solidFill>
                 <a:latin typeface="Calibri"/>
               </a:rPr>
-              <a:t>Jetson'ning asosiy afzalligi — to'liq CUDA ekotizimi: ma'lumot markazida ishlatiladigan PyTorch, TensorRT, cuDNN, DeepStream, Triton Inference Server bevosita ishlaydi, shuning uchun…</a:t>
+              <a:t>Jetson'ning asosiy afzalligi — to'liq CUDA ekotizimi: ma'lumot markazida ishlatiladigan PyTorch, TensorRT, cuDNN, DeepStream, Triton Inference Server bevosita ishlaydi, shuning uchun bulutdan chekkaga ko'chish nisbatan oson.</a:t>
+            </a:r>
+          </a:p>
+          <a:p>
+            <a:pPr>
+              <a:spcBef>
+                <a:spcPts val="400"/>
+              </a:spcBef>
+            </a:pPr>
+            <a:r>
+              <a:rPr sz="1400">
+                <a:solidFill>
+                  <a:srgbClr val="334055"/>
+                </a:solidFill>
+                <a:latin typeface="Calibri"/>
+              </a:rPr>
+              <a:t>DLA bloklari esa INT8/FP16 konvolyutsion tarmoqlarni GPU'dan kamroq quvvat bilan bajaradi va GPU'ni boshqa vazifalarga bo'shatadi.</a:t>
             </a:r>
           </a:p>
         </p:txBody>
@@ -6999,12 +7118,12 @@
         </p:nvSpPr>
         <p:spPr>
           <a:xfrm>
-            <a:off x="550000" y="3835000"/>
-            <a:ext cx="11100000" cy="1147500"/>
+            <a:off x="550000" y="4636740"/>
+            <a:ext cx="11100000" cy="1503480"/>
           </a:xfrm>
           <a:prstGeom prst="roundRect">
             <a:avLst>
-              <a:gd name="adj" fmla="val 18000"/>
+              <a:gd name="adj" fmla="val 8000"/>
             </a:avLst>
           </a:prstGeom>
           <a:solidFill>
@@ -7045,8 +7164,8 @@
         </p:nvSpPr>
         <p:spPr>
           <a:xfrm>
-            <a:off x="550000" y="3835000"/>
-            <a:ext cx="70000" cy="1147500"/>
+            <a:off x="550000" y="4636740"/>
+            <a:ext cx="70000" cy="1503480"/>
           </a:xfrm>
           <a:prstGeom prst="rect">
             <a:avLst/>
@@ -7089,8 +7208,8 @@
         </p:nvSpPr>
         <p:spPr>
           <a:xfrm>
-            <a:off x="800000" y="4178750"/>
-            <a:ext cx="460000" cy="460000"/>
+            <a:off x="780000" y="5178480"/>
+            <a:ext cx="420000" cy="420000"/>
           </a:xfrm>
           <a:prstGeom prst="ellipse">
             <a:avLst/>
@@ -7123,7 +7242,7 @@
           <a:p>
             <a:pPr algn="ctr"/>
             <a:r>
-              <a:rPr sz="1600" b="1">
+              <a:rPr sz="1400" b="1">
                 <a:solidFill>
                   <a:srgbClr val="FFFFFF"/>
                 </a:solidFill>
@@ -7142,8 +7261,8 @@
         </p:nvSpPr>
         <p:spPr>
           <a:xfrm>
-            <a:off x="1450000" y="3835000"/>
-            <a:ext cx="10050000" cy="1147500"/>
+            <a:off x="1380000" y="4676740"/>
+            <a:ext cx="10150000" cy="1423480"/>
           </a:xfrm>
           <a:prstGeom prst="rect">
             <a:avLst/>
@@ -7151,12 +7270,11 @@
           <a:noFill/>
         </p:spPr>
         <p:txBody>
-          <a:bodyPr wrap="square" anchor="ctr" lIns="50800" rIns="50800">
+          <a:bodyPr wrap="square" anchor="ctr">
             <a:spAutoFit/>
           </a:bodyPr>
           <a:lstStyle/>
           <a:p>
-            <a:pPr algn="l"/>
             <a:r>
               <a:rPr sz="1400" b="0">
                 <a:solidFill>
@@ -7164,185 +7282,7 @@
                 </a:solidFill>
                 <a:latin typeface="Calibri"/>
               </a:rPr>
-              <a:t>Google Edge TPU (Coral mahsulot oilasi) — mutlaqo boshqa falsafa: faqat INT8, faqat TensorFlow Lite formatidagi va maxsus kompilyator (edgetpu_compiler) orqali o'tkazilgan modellar; 4 TOPS…</a:t>
-            </a:r>
-          </a:p>
-        </p:txBody>
-      </p:sp>
-      <p:sp>
-        <p:nvSpPr>
-          <p:cNvPr id="22" name="Rounded Rectangle 21"/>
-          <p:cNvSpPr/>
-          <p:nvPr/>
-        </p:nvSpPr>
-        <p:spPr>
-          <a:xfrm>
-            <a:off x="550000" y="5102500"/>
-            <a:ext cx="11100000" cy="1147500"/>
-          </a:xfrm>
-          <a:prstGeom prst="roundRect">
-            <a:avLst>
-              <a:gd name="adj" fmla="val 18000"/>
-            </a:avLst>
-          </a:prstGeom>
-          <a:solidFill>
-            <a:srgbClr val="F5F8FC"/>
-          </a:solidFill>
-          <a:ln>
-            <a:noFill/>
-          </a:ln>
-          <a:effectLst/>
-        </p:spPr>
-        <p:style>
-          <a:lnRef idx="1">
-            <a:schemeClr val="accent1"/>
-          </a:lnRef>
-          <a:fillRef idx="3">
-            <a:schemeClr val="accent1"/>
-          </a:fillRef>
-          <a:effectRef idx="2">
-            <a:schemeClr val="accent1"/>
-          </a:effectRef>
-          <a:fontRef idx="minor">
-            <a:schemeClr val="lt1"/>
-          </a:fontRef>
-        </p:style>
-        <p:txBody>
-          <a:bodyPr rtlCol="0" anchor="ctr"/>
-          <a:lstStyle/>
-          <a:p>
-            <a:pPr algn="ctr"/>
-          </a:p>
-        </p:txBody>
-      </p:sp>
-      <p:sp>
-        <p:nvSpPr>
-          <p:cNvPr id="23" name="Rectangle 22"/>
-          <p:cNvSpPr/>
-          <p:nvPr/>
-        </p:nvSpPr>
-        <p:spPr>
-          <a:xfrm>
-            <a:off x="550000" y="5102500"/>
-            <a:ext cx="70000" cy="1147500"/>
-          </a:xfrm>
-          <a:prstGeom prst="rect">
-            <a:avLst/>
-          </a:prstGeom>
-          <a:solidFill>
-            <a:srgbClr val="B7791F"/>
-          </a:solidFill>
-          <a:ln>
-            <a:noFill/>
-          </a:ln>
-          <a:effectLst/>
-        </p:spPr>
-        <p:style>
-          <a:lnRef idx="1">
-            <a:schemeClr val="accent1"/>
-          </a:lnRef>
-          <a:fillRef idx="3">
-            <a:schemeClr val="accent1"/>
-          </a:fillRef>
-          <a:effectRef idx="2">
-            <a:schemeClr val="accent1"/>
-          </a:effectRef>
-          <a:fontRef idx="minor">
-            <a:schemeClr val="lt1"/>
-          </a:fontRef>
-        </p:style>
-        <p:txBody>
-          <a:bodyPr rtlCol="0" anchor="ctr"/>
-          <a:lstStyle/>
-          <a:p>
-            <a:pPr algn="ctr"/>
-          </a:p>
-        </p:txBody>
-      </p:sp>
-      <p:sp>
-        <p:nvSpPr>
-          <p:cNvPr id="24" name="Oval 23"/>
-          <p:cNvSpPr/>
-          <p:nvPr/>
-        </p:nvSpPr>
-        <p:spPr>
-          <a:xfrm>
-            <a:off x="800000" y="5446250"/>
-            <a:ext cx="460000" cy="460000"/>
-          </a:xfrm>
-          <a:prstGeom prst="ellipse">
-            <a:avLst/>
-          </a:prstGeom>
-          <a:solidFill>
-            <a:srgbClr val="B7791F"/>
-          </a:solidFill>
-          <a:ln>
-            <a:noFill/>
-          </a:ln>
-          <a:effectLst/>
-        </p:spPr>
-        <p:style>
-          <a:lnRef idx="1">
-            <a:schemeClr val="accent1"/>
-          </a:lnRef>
-          <a:fillRef idx="3">
-            <a:schemeClr val="accent1"/>
-          </a:fillRef>
-          <a:effectRef idx="2">
-            <a:schemeClr val="accent1"/>
-          </a:effectRef>
-          <a:fontRef idx="minor">
-            <a:schemeClr val="lt1"/>
-          </a:fontRef>
-        </p:style>
-        <p:txBody>
-          <a:bodyPr rtlCol="0" anchor="ctr" lIns="0" rIns="0"/>
-          <a:lstStyle/>
-          <a:p>
-            <a:pPr algn="ctr"/>
-            <a:r>
-              <a:rPr sz="1600" b="1">
-                <a:solidFill>
-                  <a:srgbClr val="FFFFFF"/>
-                </a:solidFill>
-                <a:latin typeface="Calibri"/>
-              </a:rPr>
-              <a:t>4</a:t>
-            </a:r>
-          </a:p>
-        </p:txBody>
-      </p:sp>
-      <p:sp>
-        <p:nvSpPr>
-          <p:cNvPr id="25" name="TextBox 24"/>
-          <p:cNvSpPr txBox="1"/>
-          <p:nvPr/>
-        </p:nvSpPr>
-        <p:spPr>
-          <a:xfrm>
-            <a:off x="1450000" y="5102500"/>
-            <a:ext cx="10050000" cy="1147500"/>
-          </a:xfrm>
-          <a:prstGeom prst="rect">
-            <a:avLst/>
-          </a:prstGeom>
-          <a:noFill/>
-        </p:spPr>
-        <p:txBody>
-          <a:bodyPr wrap="square" anchor="ctr" lIns="50800" rIns="50800">
-            <a:spAutoFit/>
-          </a:bodyPr>
-          <a:lstStyle/>
-          <a:p>
-            <a:pPr algn="l"/>
-            <a:r>
-              <a:rPr sz="1400" b="0">
-                <a:solidFill>
-                  <a:srgbClr val="1B2430"/>
-                </a:solidFill>
-                <a:latin typeface="Calibri"/>
-              </a:rPr>
-              <a:t>Mobil telefonlarda NPU — Apple Neural Engine, Qualcomm Hexagon, Samsung/Google tensor bloklari — o'nlab TOPS beradi; ularga kirish Core ML, Android NNAPI (hozir asta-sekin LiteRT…</a:t>
+              <a:t>Google Edge TPU (Coral mahsulot oilasi) — mutlaqo boshqa falsafa: faqat INT8, faqat TensorFlow Lite formatidagi va maxsus kompilyator (edgetpu_compiler) orqali o'tkazilgan modellar; 4 TOPS (INT8) unumdorlik atigi ~2 Vt (0,5 Vt/TOPS) iste'molda; USB stik…</a:t>
             </a:r>
           </a:p>
         </p:txBody>
@@ -7364,7 +7304,7 @@
               <p:cTn id="2" dur="indefinite" nodeType="mainSeq">
                 <p:childTnLst>
                   <p:par>
-                    <p:cTn id="103" fill="hold">
+                    <p:cTn id="79" fill="hold">
                       <p:stCondLst>
                         <p:cond delay="indefinite"/>
                         <p:cond evt="onBegin" delay="0">
@@ -8472,366 +8412,6 @@
                                         <p:cTn id="78" dur="550" fill="hold"/>
                                         <p:tgtEl>
                                           <p:spTgt spid="21"/>
-                                        </p:tgtEl>
-                                        <p:attrNameLst>
-                                          <p:attrName>ppt_y</p:attrName>
-                                        </p:attrNameLst>
-                                      </p:cBhvr>
-                                      <p:tavLst>
-                                        <p:tav tm="0">
-                                          <p:val>
-                                            <p:strVal val="#ppt_y+.08"/>
-                                          </p:val>
-                                        </p:tav>
-                                        <p:tav tm="100000">
-                                          <p:val>
-                                            <p:strVal val="#ppt_y"/>
-                                          </p:val>
-                                        </p:tav>
-                                      </p:tavLst>
-                                    </p:anim>
-                                  </p:childTnLst>
-                                </p:cTn>
-                              </p:par>
-                            </p:childTnLst>
-                          </p:cTn>
-                        </p:par>
-                        <p:par>
-                          <p:cTn id="79" fill="hold">
-                            <p:stCondLst>
-                              <p:cond delay="880"/>
-                            </p:stCondLst>
-                            <p:childTnLst>
-                              <p:par>
-                                <p:cTn id="80" presetID="42" presetClass="entr" presetSubtype="0" fill="hold" grpId="0" nodeType="afterEffect">
-                                  <p:stCondLst>
-                                    <p:cond delay="0"/>
-                                  </p:stCondLst>
-                                  <p:childTnLst>
-                                    <p:set>
-                                      <p:cBhvr>
-                                        <p:cTn id="81" dur="1" fill="hold">
-                                          <p:stCondLst>
-                                            <p:cond delay="0"/>
-                                          </p:stCondLst>
-                                        </p:cTn>
-                                        <p:tgtEl>
-                                          <p:spTgt spid="22"/>
-                                        </p:tgtEl>
-                                        <p:attrNameLst>
-                                          <p:attrName>style.visibility</p:attrName>
-                                        </p:attrNameLst>
-                                      </p:cBhvr>
-                                      <p:to>
-                                        <p:strVal val="visible"/>
-                                      </p:to>
-                                    </p:set>
-                                    <p:animEffect transition="in" filter="fade">
-                                      <p:cBhvr>
-                                        <p:cTn id="82" dur="550"/>
-                                        <p:tgtEl>
-                                          <p:spTgt spid="22"/>
-                                        </p:tgtEl>
-                                      </p:cBhvr>
-                                    </p:animEffect>
-                                    <p:anim calcmode="lin" valueType="num">
-                                      <p:cBhvr additive="base">
-                                        <p:cTn id="83" dur="550" fill="hold"/>
-                                        <p:tgtEl>
-                                          <p:spTgt spid="22"/>
-                                        </p:tgtEl>
-                                        <p:attrNameLst>
-                                          <p:attrName>ppt_x</p:attrName>
-                                        </p:attrNameLst>
-                                      </p:cBhvr>
-                                      <p:tavLst>
-                                        <p:tav tm="0">
-                                          <p:val>
-                                            <p:strVal val="#ppt_x"/>
-                                          </p:val>
-                                        </p:tav>
-                                        <p:tav tm="100000">
-                                          <p:val>
-                                            <p:strVal val="#ppt_x"/>
-                                          </p:val>
-                                        </p:tav>
-                                      </p:tavLst>
-                                    </p:anim>
-                                    <p:anim calcmode="lin" valueType="num">
-                                      <p:cBhvr additive="base">
-                                        <p:cTn id="84" dur="550" fill="hold"/>
-                                        <p:tgtEl>
-                                          <p:spTgt spid="22"/>
-                                        </p:tgtEl>
-                                        <p:attrNameLst>
-                                          <p:attrName>ppt_y</p:attrName>
-                                        </p:attrNameLst>
-                                      </p:cBhvr>
-                                      <p:tavLst>
-                                        <p:tav tm="0">
-                                          <p:val>
-                                            <p:strVal val="#ppt_y+.08"/>
-                                          </p:val>
-                                        </p:tav>
-                                        <p:tav tm="100000">
-                                          <p:val>
-                                            <p:strVal val="#ppt_y"/>
-                                          </p:val>
-                                        </p:tav>
-                                      </p:tavLst>
-                                    </p:anim>
-                                  </p:childTnLst>
-                                </p:cTn>
-                              </p:par>
-                            </p:childTnLst>
-                          </p:cTn>
-                        </p:par>
-                        <p:par>
-                          <p:cTn id="85" fill="hold">
-                            <p:stCondLst>
-                              <p:cond delay="880"/>
-                            </p:stCondLst>
-                            <p:childTnLst>
-                              <p:par>
-                                <p:cTn id="86" presetID="42" presetClass="entr" presetSubtype="0" fill="hold" grpId="0" nodeType="afterEffect">
-                                  <p:stCondLst>
-                                    <p:cond delay="0"/>
-                                  </p:stCondLst>
-                                  <p:childTnLst>
-                                    <p:set>
-                                      <p:cBhvr>
-                                        <p:cTn id="87" dur="1" fill="hold">
-                                          <p:stCondLst>
-                                            <p:cond delay="0"/>
-                                          </p:stCondLst>
-                                        </p:cTn>
-                                        <p:tgtEl>
-                                          <p:spTgt spid="23"/>
-                                        </p:tgtEl>
-                                        <p:attrNameLst>
-                                          <p:attrName>style.visibility</p:attrName>
-                                        </p:attrNameLst>
-                                      </p:cBhvr>
-                                      <p:to>
-                                        <p:strVal val="visible"/>
-                                      </p:to>
-                                    </p:set>
-                                    <p:animEffect transition="in" filter="fade">
-                                      <p:cBhvr>
-                                        <p:cTn id="88" dur="550"/>
-                                        <p:tgtEl>
-                                          <p:spTgt spid="23"/>
-                                        </p:tgtEl>
-                                      </p:cBhvr>
-                                    </p:animEffect>
-                                    <p:anim calcmode="lin" valueType="num">
-                                      <p:cBhvr additive="base">
-                                        <p:cTn id="89" dur="550" fill="hold"/>
-                                        <p:tgtEl>
-                                          <p:spTgt spid="23"/>
-                                        </p:tgtEl>
-                                        <p:attrNameLst>
-                                          <p:attrName>ppt_x</p:attrName>
-                                        </p:attrNameLst>
-                                      </p:cBhvr>
-                                      <p:tavLst>
-                                        <p:tav tm="0">
-                                          <p:val>
-                                            <p:strVal val="#ppt_x"/>
-                                          </p:val>
-                                        </p:tav>
-                                        <p:tav tm="100000">
-                                          <p:val>
-                                            <p:strVal val="#ppt_x"/>
-                                          </p:val>
-                                        </p:tav>
-                                      </p:tavLst>
-                                    </p:anim>
-                                    <p:anim calcmode="lin" valueType="num">
-                                      <p:cBhvr additive="base">
-                                        <p:cTn id="90" dur="550" fill="hold"/>
-                                        <p:tgtEl>
-                                          <p:spTgt spid="23"/>
-                                        </p:tgtEl>
-                                        <p:attrNameLst>
-                                          <p:attrName>ppt_y</p:attrName>
-                                        </p:attrNameLst>
-                                      </p:cBhvr>
-                                      <p:tavLst>
-                                        <p:tav tm="0">
-                                          <p:val>
-                                            <p:strVal val="#ppt_y+.08"/>
-                                          </p:val>
-                                        </p:tav>
-                                        <p:tav tm="100000">
-                                          <p:val>
-                                            <p:strVal val="#ppt_y"/>
-                                          </p:val>
-                                        </p:tav>
-                                      </p:tavLst>
-                                    </p:anim>
-                                  </p:childTnLst>
-                                </p:cTn>
-                              </p:par>
-                            </p:childTnLst>
-                          </p:cTn>
-                        </p:par>
-                        <p:par>
-                          <p:cTn id="91" fill="hold">
-                            <p:stCondLst>
-                              <p:cond delay="880"/>
-                            </p:stCondLst>
-                            <p:childTnLst>
-                              <p:par>
-                                <p:cTn id="92" presetID="53" presetClass="entr" presetSubtype="16" fill="hold" grpId="0" nodeType="afterEffect">
-                                  <p:stCondLst>
-                                    <p:cond delay="0"/>
-                                  </p:stCondLst>
-                                  <p:childTnLst>
-                                    <p:set>
-                                      <p:cBhvr>
-                                        <p:cTn id="93" dur="1" fill="hold">
-                                          <p:stCondLst>
-                                            <p:cond delay="0"/>
-                                          </p:stCondLst>
-                                        </p:cTn>
-                                        <p:tgtEl>
-                                          <p:spTgt spid="24"/>
-                                        </p:tgtEl>
-                                        <p:attrNameLst>
-                                          <p:attrName>style.visibility</p:attrName>
-                                        </p:attrNameLst>
-                                      </p:cBhvr>
-                                      <p:to>
-                                        <p:strVal val="visible"/>
-                                      </p:to>
-                                    </p:set>
-                                    <p:animEffect transition="in" filter="fade">
-                                      <p:cBhvr>
-                                        <p:cTn id="94" dur="550"/>
-                                        <p:tgtEl>
-                                          <p:spTgt spid="24"/>
-                                        </p:tgtEl>
-                                      </p:cBhvr>
-                                    </p:animEffect>
-                                    <p:anim calcmode="lin" valueType="num">
-                                      <p:cBhvr additive="base">
-                                        <p:cTn id="95" dur="550" fill="hold"/>
-                                        <p:tgtEl>
-                                          <p:spTgt spid="24"/>
-                                        </p:tgtEl>
-                                        <p:attrNameLst>
-                                          <p:attrName>ppt_w</p:attrName>
-                                        </p:attrNameLst>
-                                      </p:cBhvr>
-                                      <p:tavLst>
-                                        <p:tav tm="0">
-                                          <p:val>
-                                            <p:strVal val="0"/>
-                                          </p:val>
-                                        </p:tav>
-                                        <p:tav tm="100000">
-                                          <p:val>
-                                            <p:strVal val="#ppt_w"/>
-                                          </p:val>
-                                        </p:tav>
-                                      </p:tavLst>
-                                    </p:anim>
-                                    <p:anim calcmode="lin" valueType="num">
-                                      <p:cBhvr additive="base">
-                                        <p:cTn id="96" dur="550" fill="hold"/>
-                                        <p:tgtEl>
-                                          <p:spTgt spid="24"/>
-                                        </p:tgtEl>
-                                        <p:attrNameLst>
-                                          <p:attrName>ppt_h</p:attrName>
-                                        </p:attrNameLst>
-                                      </p:cBhvr>
-                                      <p:tavLst>
-                                        <p:tav tm="0">
-                                          <p:val>
-                                            <p:strVal val="0"/>
-                                          </p:val>
-                                        </p:tav>
-                                        <p:tav tm="100000">
-                                          <p:val>
-                                            <p:strVal val="#ppt_h"/>
-                                          </p:val>
-                                        </p:tav>
-                                      </p:tavLst>
-                                    </p:anim>
-                                  </p:childTnLst>
-                                </p:cTn>
-                              </p:par>
-                            </p:childTnLst>
-                          </p:cTn>
-                        </p:par>
-                        <p:par>
-                          <p:cTn id="97" fill="hold">
-                            <p:stCondLst>
-                              <p:cond delay="880"/>
-                            </p:stCondLst>
-                            <p:childTnLst>
-                              <p:par>
-                                <p:cTn id="98" presetID="42" presetClass="entr" presetSubtype="0" fill="hold" grpId="0" nodeType="afterEffect">
-                                  <p:stCondLst>
-                                    <p:cond delay="0"/>
-                                  </p:stCondLst>
-                                  <p:childTnLst>
-                                    <p:set>
-                                      <p:cBhvr>
-                                        <p:cTn id="99" dur="1" fill="hold">
-                                          <p:stCondLst>
-                                            <p:cond delay="0"/>
-                                          </p:stCondLst>
-                                        </p:cTn>
-                                        <p:tgtEl>
-                                          <p:spTgt spid="25"/>
-                                        </p:tgtEl>
-                                        <p:attrNameLst>
-                                          <p:attrName>style.visibility</p:attrName>
-                                        </p:attrNameLst>
-                                      </p:cBhvr>
-                                      <p:to>
-                                        <p:strVal val="visible"/>
-                                      </p:to>
-                                    </p:set>
-                                    <p:animEffect transition="in" filter="fade">
-                                      <p:cBhvr>
-                                        <p:cTn id="100" dur="550"/>
-                                        <p:tgtEl>
-                                          <p:spTgt spid="25"/>
-                                        </p:tgtEl>
-                                      </p:cBhvr>
-                                    </p:animEffect>
-                                    <p:anim calcmode="lin" valueType="num">
-                                      <p:cBhvr additive="base">
-                                        <p:cTn id="101" dur="550" fill="hold"/>
-                                        <p:tgtEl>
-                                          <p:spTgt spid="25"/>
-                                        </p:tgtEl>
-                                        <p:attrNameLst>
-                                          <p:attrName>ppt_x</p:attrName>
-                                        </p:attrNameLst>
-                                      </p:cBhvr>
-                                      <p:tavLst>
-                                        <p:tav tm="0">
-                                          <p:val>
-                                            <p:strVal val="#ppt_x"/>
-                                          </p:val>
-                                        </p:tav>
-                                        <p:tav tm="100000">
-                                          <p:val>
-                                            <p:strVal val="#ppt_x"/>
-                                          </p:val>
-                                        </p:tav>
-                                      </p:tavLst>
-                                    </p:anim>
-                                    <p:anim calcmode="lin" valueType="num">
-                                      <p:cBhvr additive="base">
-                                        <p:cTn id="102" dur="550" fill="hold"/>
-                                        <p:tgtEl>
-                                          <p:spTgt spid="25"/>
                                         </p:tgtEl>
                                         <p:attrNameLst>
                                           <p:attrName>ppt_y</p:attrName>
@@ -8894,10 +8474,6 @@
       <p:bldP spid="19" grpId="0" animBg="1"/>
       <p:bldP spid="20" grpId="0" animBg="1"/>
       <p:bldP spid="21" grpId="0" animBg="1"/>
-      <p:bldP spid="22" grpId="0" animBg="1"/>
-      <p:bldP spid="23" grpId="0" animBg="1"/>
-      <p:bldP spid="24" grpId="0" animBg="1"/>
-      <p:bldP spid="25" grpId="0" animBg="1"/>
     </p:bldLst>
   </p:timing>
 </p:sld>
@@ -9233,6 +8809,981 @@
                 <a:latin typeface="Calibri"/>
               </a:rPr>
               <a:t>12</a:t>
+            </a:r>
+          </a:p>
+        </p:txBody>
+      </p:sp>
+      <p:sp>
+        <p:nvSpPr>
+          <p:cNvPr id="10" name="Rounded Rectangle 9"/>
+          <p:cNvSpPr/>
+          <p:nvPr/>
+        </p:nvSpPr>
+        <p:spPr>
+          <a:xfrm>
+            <a:off x="550000" y="3182518"/>
+            <a:ext cx="11100000" cy="1184964"/>
+          </a:xfrm>
+          <a:prstGeom prst="roundRect">
+            <a:avLst>
+              <a:gd name="adj" fmla="val 8000"/>
+            </a:avLst>
+          </a:prstGeom>
+          <a:solidFill>
+            <a:srgbClr val="F5F8FC"/>
+          </a:solidFill>
+          <a:ln>
+            <a:noFill/>
+          </a:ln>
+          <a:effectLst/>
+        </p:spPr>
+        <p:style>
+          <a:lnRef idx="1">
+            <a:schemeClr val="accent1"/>
+          </a:lnRef>
+          <a:fillRef idx="3">
+            <a:schemeClr val="accent1"/>
+          </a:fillRef>
+          <a:effectRef idx="2">
+            <a:schemeClr val="accent1"/>
+          </a:effectRef>
+          <a:fontRef idx="minor">
+            <a:schemeClr val="lt1"/>
+          </a:fontRef>
+        </p:style>
+        <p:txBody>
+          <a:bodyPr rtlCol="0" anchor="ctr"/>
+          <a:lstStyle/>
+          <a:p>
+            <a:pPr algn="ctr"/>
+          </a:p>
+        </p:txBody>
+      </p:sp>
+      <p:sp>
+        <p:nvSpPr>
+          <p:cNvPr id="11" name="Rectangle 10"/>
+          <p:cNvSpPr/>
+          <p:nvPr/>
+        </p:nvSpPr>
+        <p:spPr>
+          <a:xfrm>
+            <a:off x="550000" y="3182518"/>
+            <a:ext cx="70000" cy="1184964"/>
+          </a:xfrm>
+          <a:prstGeom prst="rect">
+            <a:avLst/>
+          </a:prstGeom>
+          <a:solidFill>
+            <a:srgbClr val="B7791F"/>
+          </a:solidFill>
+          <a:ln>
+            <a:noFill/>
+          </a:ln>
+          <a:effectLst/>
+        </p:spPr>
+        <p:style>
+          <a:lnRef idx="1">
+            <a:schemeClr val="accent1"/>
+          </a:lnRef>
+          <a:fillRef idx="3">
+            <a:schemeClr val="accent1"/>
+          </a:fillRef>
+          <a:effectRef idx="2">
+            <a:schemeClr val="accent1"/>
+          </a:effectRef>
+          <a:fontRef idx="minor">
+            <a:schemeClr val="lt1"/>
+          </a:fontRef>
+        </p:style>
+        <p:txBody>
+          <a:bodyPr rtlCol="0" anchor="ctr"/>
+          <a:lstStyle/>
+          <a:p>
+            <a:pPr algn="ctr"/>
+          </a:p>
+        </p:txBody>
+      </p:sp>
+      <p:sp>
+        <p:nvSpPr>
+          <p:cNvPr id="12" name="Oval 11"/>
+          <p:cNvSpPr/>
+          <p:nvPr/>
+        </p:nvSpPr>
+        <p:spPr>
+          <a:xfrm>
+            <a:off x="780000" y="3565000"/>
+            <a:ext cx="420000" cy="420000"/>
+          </a:xfrm>
+          <a:prstGeom prst="ellipse">
+            <a:avLst/>
+          </a:prstGeom>
+          <a:solidFill>
+            <a:srgbClr val="B7791F"/>
+          </a:solidFill>
+          <a:ln>
+            <a:noFill/>
+          </a:ln>
+          <a:effectLst/>
+        </p:spPr>
+        <p:style>
+          <a:lnRef idx="1">
+            <a:schemeClr val="accent1"/>
+          </a:lnRef>
+          <a:fillRef idx="3">
+            <a:schemeClr val="accent1"/>
+          </a:fillRef>
+          <a:effectRef idx="2">
+            <a:schemeClr val="accent1"/>
+          </a:effectRef>
+          <a:fontRef idx="minor">
+            <a:schemeClr val="lt1"/>
+          </a:fontRef>
+        </p:style>
+        <p:txBody>
+          <a:bodyPr rtlCol="0" anchor="ctr" lIns="0" rIns="0"/>
+          <a:lstStyle/>
+          <a:p>
+            <a:pPr algn="ctr"/>
+            <a:r>
+              <a:rPr sz="1400" b="1">
+                <a:solidFill>
+                  <a:srgbClr val="FFFFFF"/>
+                </a:solidFill>
+                <a:latin typeface="Calibri"/>
+              </a:rPr>
+              <a:t>4</a:t>
+            </a:r>
+          </a:p>
+        </p:txBody>
+      </p:sp>
+      <p:sp>
+        <p:nvSpPr>
+          <p:cNvPr id="13" name="TextBox 12"/>
+          <p:cNvSpPr txBox="1"/>
+          <p:nvPr/>
+        </p:nvSpPr>
+        <p:spPr>
+          <a:xfrm>
+            <a:off x="1380000" y="3222518"/>
+            <a:ext cx="10150000" cy="1104964"/>
+          </a:xfrm>
+          <a:prstGeom prst="rect">
+            <a:avLst/>
+          </a:prstGeom>
+          <a:noFill/>
+        </p:spPr>
+        <p:txBody>
+          <a:bodyPr wrap="square" anchor="ctr">
+            <a:spAutoFit/>
+          </a:bodyPr>
+          <a:lstStyle/>
+          <a:p>
+            <a:r>
+              <a:rPr sz="1700" b="0">
+                <a:solidFill>
+                  <a:srgbClr val="1B2430"/>
+                </a:solidFill>
+                <a:latin typeface="Calibri"/>
+              </a:rPr>
+              <a:t>Mobil telefonlarda NPU — Apple Neural Engine, Qualcomm Hexagon, Samsung/Google tensor bloklari — o'nlab TOPS beradi; ularga kirish Core ML, Android NNAPI (hozir asta-sekin LiteRT delegatlari va vendor SDK'lar bilan almashtirilmoqda), Qualcomm QNN orqali…</a:t>
+            </a:r>
+          </a:p>
+        </p:txBody>
+      </p:sp>
+    </p:spTree>
+  </p:cSld>
+  <p:clrMapOvr>
+    <a:masterClrMapping/>
+  </p:clrMapOvr>
+  <p:transition spd="med">
+    <p:fade/>
+  </p:transition>
+  <p:timing>
+    <p:tnLst>
+      <p:par>
+        <p:cTn id="1" dur="indefinite" restart="never" nodeType="tmRoot">
+          <p:childTnLst>
+            <p:seq concurrent="1" nextAc="seek">
+              <p:cTn id="2" dur="indefinite" nodeType="mainSeq">
+                <p:childTnLst>
+                  <p:par>
+                    <p:cTn id="31" fill="hold">
+                      <p:stCondLst>
+                        <p:cond delay="indefinite"/>
+                        <p:cond evt="onBegin" delay="0">
+                          <p:tn val="2"/>
+                        </p:cond>
+                      </p:stCondLst>
+                      <p:childTnLst>
+                        <p:par>
+                          <p:cTn id="3" fill="hold">
+                            <p:stCondLst>
+                              <p:cond delay="0"/>
+                            </p:stCondLst>
+                            <p:childTnLst>
+                              <p:par>
+                                <p:cTn id="4" presetID="10" presetClass="entr" presetSubtype="0" fill="hold" grpId="0" nodeType="withEffect">
+                                  <p:stCondLst>
+                                    <p:cond delay="0"/>
+                                  </p:stCondLst>
+                                  <p:childTnLst>
+                                    <p:set>
+                                      <p:cBhvr>
+                                        <p:cTn id="5" dur="1" fill="hold">
+                                          <p:stCondLst>
+                                            <p:cond delay="0"/>
+                                          </p:stCondLst>
+                                        </p:cTn>
+                                        <p:tgtEl>
+                                          <p:spTgt spid="6"/>
+                                        </p:tgtEl>
+                                        <p:attrNameLst>
+                                          <p:attrName>style.visibility</p:attrName>
+                                        </p:attrNameLst>
+                                      </p:cBhvr>
+                                      <p:to>
+                                        <p:strVal val="visible"/>
+                                      </p:to>
+                                    </p:set>
+                                    <p:animEffect transition="in" filter="fade">
+                                      <p:cBhvr>
+                                        <p:cTn id="6" dur="550"/>
+                                        <p:tgtEl>
+                                          <p:spTgt spid="6"/>
+                                        </p:tgtEl>
+                                      </p:cBhvr>
+                                    </p:animEffect>
+                                  </p:childTnLst>
+                                </p:cTn>
+                              </p:par>
+                            </p:childTnLst>
+                          </p:cTn>
+                        </p:par>
+                        <p:par>
+                          <p:cTn id="7" fill="hold">
+                            <p:stCondLst>
+                              <p:cond delay="220"/>
+                            </p:stCondLst>
+                            <p:childTnLst>
+                              <p:par>
+                                <p:cTn id="8" presetID="42" presetClass="entr" presetSubtype="0" fill="hold" grpId="0" nodeType="afterEffect">
+                                  <p:stCondLst>
+                                    <p:cond delay="0"/>
+                                  </p:stCondLst>
+                                  <p:childTnLst>
+                                    <p:set>
+                                      <p:cBhvr>
+                                        <p:cTn id="9" dur="1" fill="hold">
+                                          <p:stCondLst>
+                                            <p:cond delay="0"/>
+                                          </p:stCondLst>
+                                        </p:cTn>
+                                        <p:tgtEl>
+                                          <p:spTgt spid="10"/>
+                                        </p:tgtEl>
+                                        <p:attrNameLst>
+                                          <p:attrName>style.visibility</p:attrName>
+                                        </p:attrNameLst>
+                                      </p:cBhvr>
+                                      <p:to>
+                                        <p:strVal val="visible"/>
+                                      </p:to>
+                                    </p:set>
+                                    <p:animEffect transition="in" filter="fade">
+                                      <p:cBhvr>
+                                        <p:cTn id="10" dur="550"/>
+                                        <p:tgtEl>
+                                          <p:spTgt spid="10"/>
+                                        </p:tgtEl>
+                                      </p:cBhvr>
+                                    </p:animEffect>
+                                    <p:anim calcmode="lin" valueType="num">
+                                      <p:cBhvr additive="base">
+                                        <p:cTn id="11" dur="550" fill="hold"/>
+                                        <p:tgtEl>
+                                          <p:spTgt spid="10"/>
+                                        </p:tgtEl>
+                                        <p:attrNameLst>
+                                          <p:attrName>ppt_x</p:attrName>
+                                        </p:attrNameLst>
+                                      </p:cBhvr>
+                                      <p:tavLst>
+                                        <p:tav tm="0">
+                                          <p:val>
+                                            <p:strVal val="#ppt_x"/>
+                                          </p:val>
+                                        </p:tav>
+                                        <p:tav tm="100000">
+                                          <p:val>
+                                            <p:strVal val="#ppt_x"/>
+                                          </p:val>
+                                        </p:tav>
+                                      </p:tavLst>
+                                    </p:anim>
+                                    <p:anim calcmode="lin" valueType="num">
+                                      <p:cBhvr additive="base">
+                                        <p:cTn id="12" dur="550" fill="hold"/>
+                                        <p:tgtEl>
+                                          <p:spTgt spid="10"/>
+                                        </p:tgtEl>
+                                        <p:attrNameLst>
+                                          <p:attrName>ppt_y</p:attrName>
+                                        </p:attrNameLst>
+                                      </p:cBhvr>
+                                      <p:tavLst>
+                                        <p:tav tm="0">
+                                          <p:val>
+                                            <p:strVal val="#ppt_y+.08"/>
+                                          </p:val>
+                                        </p:tav>
+                                        <p:tav tm="100000">
+                                          <p:val>
+                                            <p:strVal val="#ppt_y"/>
+                                          </p:val>
+                                        </p:tav>
+                                      </p:tavLst>
+                                    </p:anim>
+                                  </p:childTnLst>
+                                </p:cTn>
+                              </p:par>
+                            </p:childTnLst>
+                          </p:cTn>
+                        </p:par>
+                        <p:par>
+                          <p:cTn id="13" fill="hold">
+                            <p:stCondLst>
+                              <p:cond delay="220"/>
+                            </p:stCondLst>
+                            <p:childTnLst>
+                              <p:par>
+                                <p:cTn id="14" presetID="42" presetClass="entr" presetSubtype="0" fill="hold" grpId="0" nodeType="afterEffect">
+                                  <p:stCondLst>
+                                    <p:cond delay="0"/>
+                                  </p:stCondLst>
+                                  <p:childTnLst>
+                                    <p:set>
+                                      <p:cBhvr>
+                                        <p:cTn id="15" dur="1" fill="hold">
+                                          <p:stCondLst>
+                                            <p:cond delay="0"/>
+                                          </p:stCondLst>
+                                        </p:cTn>
+                                        <p:tgtEl>
+                                          <p:spTgt spid="11"/>
+                                        </p:tgtEl>
+                                        <p:attrNameLst>
+                                          <p:attrName>style.visibility</p:attrName>
+                                        </p:attrNameLst>
+                                      </p:cBhvr>
+                                      <p:to>
+                                        <p:strVal val="visible"/>
+                                      </p:to>
+                                    </p:set>
+                                    <p:animEffect transition="in" filter="fade">
+                                      <p:cBhvr>
+                                        <p:cTn id="16" dur="550"/>
+                                        <p:tgtEl>
+                                          <p:spTgt spid="11"/>
+                                        </p:tgtEl>
+                                      </p:cBhvr>
+                                    </p:animEffect>
+                                    <p:anim calcmode="lin" valueType="num">
+                                      <p:cBhvr additive="base">
+                                        <p:cTn id="17" dur="550" fill="hold"/>
+                                        <p:tgtEl>
+                                          <p:spTgt spid="11"/>
+                                        </p:tgtEl>
+                                        <p:attrNameLst>
+                                          <p:attrName>ppt_x</p:attrName>
+                                        </p:attrNameLst>
+                                      </p:cBhvr>
+                                      <p:tavLst>
+                                        <p:tav tm="0">
+                                          <p:val>
+                                            <p:strVal val="#ppt_x"/>
+                                          </p:val>
+                                        </p:tav>
+                                        <p:tav tm="100000">
+                                          <p:val>
+                                            <p:strVal val="#ppt_x"/>
+                                          </p:val>
+                                        </p:tav>
+                                      </p:tavLst>
+                                    </p:anim>
+                                    <p:anim calcmode="lin" valueType="num">
+                                      <p:cBhvr additive="base">
+                                        <p:cTn id="18" dur="550" fill="hold"/>
+                                        <p:tgtEl>
+                                          <p:spTgt spid="11"/>
+                                        </p:tgtEl>
+                                        <p:attrNameLst>
+                                          <p:attrName>ppt_y</p:attrName>
+                                        </p:attrNameLst>
+                                      </p:cBhvr>
+                                      <p:tavLst>
+                                        <p:tav tm="0">
+                                          <p:val>
+                                            <p:strVal val="#ppt_y+.08"/>
+                                          </p:val>
+                                        </p:tav>
+                                        <p:tav tm="100000">
+                                          <p:val>
+                                            <p:strVal val="#ppt_y"/>
+                                          </p:val>
+                                        </p:tav>
+                                      </p:tavLst>
+                                    </p:anim>
+                                  </p:childTnLst>
+                                </p:cTn>
+                              </p:par>
+                            </p:childTnLst>
+                          </p:cTn>
+                        </p:par>
+                        <p:par>
+                          <p:cTn id="19" fill="hold">
+                            <p:stCondLst>
+                              <p:cond delay="220"/>
+                            </p:stCondLst>
+                            <p:childTnLst>
+                              <p:par>
+                                <p:cTn id="20" presetID="53" presetClass="entr" presetSubtype="16" fill="hold" grpId="0" nodeType="afterEffect">
+                                  <p:stCondLst>
+                                    <p:cond delay="0"/>
+                                  </p:stCondLst>
+                                  <p:childTnLst>
+                                    <p:set>
+                                      <p:cBhvr>
+                                        <p:cTn id="21" dur="1" fill="hold">
+                                          <p:stCondLst>
+                                            <p:cond delay="0"/>
+                                          </p:stCondLst>
+                                        </p:cTn>
+                                        <p:tgtEl>
+                                          <p:spTgt spid="12"/>
+                                        </p:tgtEl>
+                                        <p:attrNameLst>
+                                          <p:attrName>style.visibility</p:attrName>
+                                        </p:attrNameLst>
+                                      </p:cBhvr>
+                                      <p:to>
+                                        <p:strVal val="visible"/>
+                                      </p:to>
+                                    </p:set>
+                                    <p:animEffect transition="in" filter="fade">
+                                      <p:cBhvr>
+                                        <p:cTn id="22" dur="550"/>
+                                        <p:tgtEl>
+                                          <p:spTgt spid="12"/>
+                                        </p:tgtEl>
+                                      </p:cBhvr>
+                                    </p:animEffect>
+                                    <p:anim calcmode="lin" valueType="num">
+                                      <p:cBhvr additive="base">
+                                        <p:cTn id="23" dur="550" fill="hold"/>
+                                        <p:tgtEl>
+                                          <p:spTgt spid="12"/>
+                                        </p:tgtEl>
+                                        <p:attrNameLst>
+                                          <p:attrName>ppt_w</p:attrName>
+                                        </p:attrNameLst>
+                                      </p:cBhvr>
+                                      <p:tavLst>
+                                        <p:tav tm="0">
+                                          <p:val>
+                                            <p:strVal val="0"/>
+                                          </p:val>
+                                        </p:tav>
+                                        <p:tav tm="100000">
+                                          <p:val>
+                                            <p:strVal val="#ppt_w"/>
+                                          </p:val>
+                                        </p:tav>
+                                      </p:tavLst>
+                                    </p:anim>
+                                    <p:anim calcmode="lin" valueType="num">
+                                      <p:cBhvr additive="base">
+                                        <p:cTn id="24" dur="550" fill="hold"/>
+                                        <p:tgtEl>
+                                          <p:spTgt spid="12"/>
+                                        </p:tgtEl>
+                                        <p:attrNameLst>
+                                          <p:attrName>ppt_h</p:attrName>
+                                        </p:attrNameLst>
+                                      </p:cBhvr>
+                                      <p:tavLst>
+                                        <p:tav tm="0">
+                                          <p:val>
+                                            <p:strVal val="0"/>
+                                          </p:val>
+                                        </p:tav>
+                                        <p:tav tm="100000">
+                                          <p:val>
+                                            <p:strVal val="#ppt_h"/>
+                                          </p:val>
+                                        </p:tav>
+                                      </p:tavLst>
+                                    </p:anim>
+                                  </p:childTnLst>
+                                </p:cTn>
+                              </p:par>
+                            </p:childTnLst>
+                          </p:cTn>
+                        </p:par>
+                        <p:par>
+                          <p:cTn id="25" fill="hold">
+                            <p:stCondLst>
+                              <p:cond delay="220"/>
+                            </p:stCondLst>
+                            <p:childTnLst>
+                              <p:par>
+                                <p:cTn id="26" presetID="42" presetClass="entr" presetSubtype="0" fill="hold" grpId="0" nodeType="afterEffect">
+                                  <p:stCondLst>
+                                    <p:cond delay="0"/>
+                                  </p:stCondLst>
+                                  <p:childTnLst>
+                                    <p:set>
+                                      <p:cBhvr>
+                                        <p:cTn id="27" dur="1" fill="hold">
+                                          <p:stCondLst>
+                                            <p:cond delay="0"/>
+                                          </p:stCondLst>
+                                        </p:cTn>
+                                        <p:tgtEl>
+                                          <p:spTgt spid="13"/>
+                                        </p:tgtEl>
+                                        <p:attrNameLst>
+                                          <p:attrName>style.visibility</p:attrName>
+                                        </p:attrNameLst>
+                                      </p:cBhvr>
+                                      <p:to>
+                                        <p:strVal val="visible"/>
+                                      </p:to>
+                                    </p:set>
+                                    <p:animEffect transition="in" filter="fade">
+                                      <p:cBhvr>
+                                        <p:cTn id="28" dur="550"/>
+                                        <p:tgtEl>
+                                          <p:spTgt spid="13"/>
+                                        </p:tgtEl>
+                                      </p:cBhvr>
+                                    </p:animEffect>
+                                    <p:anim calcmode="lin" valueType="num">
+                                      <p:cBhvr additive="base">
+                                        <p:cTn id="29" dur="550" fill="hold"/>
+                                        <p:tgtEl>
+                                          <p:spTgt spid="13"/>
+                                        </p:tgtEl>
+                                        <p:attrNameLst>
+                                          <p:attrName>ppt_x</p:attrName>
+                                        </p:attrNameLst>
+                                      </p:cBhvr>
+                                      <p:tavLst>
+                                        <p:tav tm="0">
+                                          <p:val>
+                                            <p:strVal val="#ppt_x"/>
+                                          </p:val>
+                                        </p:tav>
+                                        <p:tav tm="100000">
+                                          <p:val>
+                                            <p:strVal val="#ppt_x"/>
+                                          </p:val>
+                                        </p:tav>
+                                      </p:tavLst>
+                                    </p:anim>
+                                    <p:anim calcmode="lin" valueType="num">
+                                      <p:cBhvr additive="base">
+                                        <p:cTn id="30" dur="550" fill="hold"/>
+                                        <p:tgtEl>
+                                          <p:spTgt spid="13"/>
+                                        </p:tgtEl>
+                                        <p:attrNameLst>
+                                          <p:attrName>ppt_y</p:attrName>
+                                        </p:attrNameLst>
+                                      </p:cBhvr>
+                                      <p:tavLst>
+                                        <p:tav tm="0">
+                                          <p:val>
+                                            <p:strVal val="#ppt_y+.08"/>
+                                          </p:val>
+                                        </p:tav>
+                                        <p:tav tm="100000">
+                                          <p:val>
+                                            <p:strVal val="#ppt_y"/>
+                                          </p:val>
+                                        </p:tav>
+                                      </p:tavLst>
+                                    </p:anim>
+                                  </p:childTnLst>
+                                </p:cTn>
+                              </p:par>
+                            </p:childTnLst>
+                          </p:cTn>
+                        </p:par>
+                      </p:childTnLst>
+                    </p:cTn>
+                  </p:par>
+                </p:childTnLst>
+              </p:cTn>
+              <p:prevCondLst>
+                <p:cond evt="onPrev" delay="0">
+                  <p:tgtEl>
+                    <p:sldTgt/>
+                  </p:tgtEl>
+                </p:cond>
+              </p:prevCondLst>
+              <p:nextCondLst>
+                <p:cond evt="onNext" delay="0">
+                  <p:tgtEl>
+                    <p:sldTgt/>
+                  </p:tgtEl>
+                </p:cond>
+              </p:nextCondLst>
+            </p:seq>
+          </p:childTnLst>
+        </p:cTn>
+      </p:par>
+    </p:tnLst>
+    <p:bldLst>
+      <p:bldP spid="6" grpId="0" animBg="1"/>
+      <p:bldP spid="10" grpId="0" animBg="1"/>
+      <p:bldP spid="11" grpId="0" animBg="1"/>
+      <p:bldP spid="12" grpId="0" animBg="1"/>
+      <p:bldP spid="13" grpId="0" animBg="1"/>
+    </p:bldLst>
+  </p:timing>
+</p:sld>
+</file>
+
+<file path=ppt/slides/slide13.xml><?xml version="1.0" encoding="utf-8"?>
+<p:sld xmlns:a="http://schemas.openxmlformats.org/drawingml/2006/main" xmlns:p="http://schemas.openxmlformats.org/presentationml/2006/main" xmlns:r="http://schemas.openxmlformats.org/officeDocument/2006/relationships">
+  <p:cSld>
+    <p:spTree>
+      <p:nvGrpSpPr>
+        <p:cNvPr id="1" name=""/>
+        <p:cNvGrpSpPr/>
+        <p:nvPr/>
+      </p:nvGrpSpPr>
+      <p:grpSpPr/>
+      <p:sp>
+        <p:nvSpPr>
+          <p:cNvPr id="2" name="Rectangle 1"/>
+          <p:cNvSpPr/>
+          <p:nvPr/>
+        </p:nvSpPr>
+        <p:spPr>
+          <a:xfrm>
+            <a:off x="0" y="0"/>
+            <a:ext cx="12192000" cy="1000000"/>
+          </a:xfrm>
+          <a:prstGeom prst="rect">
+            <a:avLst/>
+          </a:prstGeom>
+          <a:gradFill rotWithShape="1">
+            <a:gsLst>
+              <a:gs pos="0">
+                <a:srgbClr val="1F3A5F"/>
+              </a:gs>
+              <a:gs pos="100000">
+                <a:srgbClr val="2D5C8F"/>
+              </a:gs>
+            </a:gsLst>
+            <a:lin scaled="0" ang="0"/>
+          </a:gradFill>
+          <a:ln>
+            <a:noFill/>
+          </a:ln>
+          <a:effectLst/>
+        </p:spPr>
+        <p:style>
+          <a:lnRef idx="1">
+            <a:schemeClr val="accent1"/>
+          </a:lnRef>
+          <a:fillRef idx="3">
+            <a:schemeClr val="accent1"/>
+          </a:fillRef>
+          <a:effectRef idx="2">
+            <a:schemeClr val="accent1"/>
+          </a:effectRef>
+          <a:fontRef idx="minor">
+            <a:schemeClr val="lt1"/>
+          </a:fontRef>
+        </p:style>
+        <p:txBody>
+          <a:bodyPr rtlCol="0" anchor="ctr"/>
+          <a:lstStyle/>
+          <a:p>
+            <a:pPr algn="ctr"/>
+          </a:p>
+        </p:txBody>
+      </p:sp>
+      <p:sp>
+        <p:nvSpPr>
+          <p:cNvPr id="3" name="Oval 2"/>
+          <p:cNvSpPr/>
+          <p:nvPr/>
+        </p:nvSpPr>
+        <p:spPr>
+          <a:xfrm>
+            <a:off x="11050000" y="-350000"/>
+            <a:ext cx="900000" cy="900000"/>
+          </a:xfrm>
+          <a:prstGeom prst="ellipse">
+            <a:avLst/>
+          </a:prstGeom>
+          <a:solidFill>
+            <a:srgbClr val="3B6EA5"/>
+          </a:solidFill>
+          <a:ln>
+            <a:noFill/>
+          </a:ln>
+          <a:effectLst/>
+        </p:spPr>
+        <p:style>
+          <a:lnRef idx="1">
+            <a:schemeClr val="accent1"/>
+          </a:lnRef>
+          <a:fillRef idx="3">
+            <a:schemeClr val="accent1"/>
+          </a:fillRef>
+          <a:effectRef idx="2">
+            <a:schemeClr val="accent1"/>
+          </a:effectRef>
+          <a:fontRef idx="minor">
+            <a:schemeClr val="lt1"/>
+          </a:fontRef>
+        </p:style>
+        <p:txBody>
+          <a:bodyPr rtlCol="0" anchor="ctr"/>
+          <a:lstStyle/>
+          <a:p>
+            <a:pPr algn="ctr"/>
+          </a:p>
+        </p:txBody>
+      </p:sp>
+      <p:sp>
+        <p:nvSpPr>
+          <p:cNvPr id="4" name="Oval 3"/>
+          <p:cNvSpPr/>
+          <p:nvPr/>
+        </p:nvSpPr>
+        <p:spPr>
+          <a:xfrm>
+            <a:off x="11550000" y="450000"/>
+            <a:ext cx="420000" cy="420000"/>
+          </a:xfrm>
+          <a:prstGeom prst="ellipse">
+            <a:avLst/>
+          </a:prstGeom>
+          <a:solidFill>
+            <a:srgbClr val="0F8B8D"/>
+          </a:solidFill>
+          <a:ln>
+            <a:noFill/>
+          </a:ln>
+          <a:effectLst/>
+        </p:spPr>
+        <p:style>
+          <a:lnRef idx="1">
+            <a:schemeClr val="accent1"/>
+          </a:lnRef>
+          <a:fillRef idx="3">
+            <a:schemeClr val="accent1"/>
+          </a:fillRef>
+          <a:effectRef idx="2">
+            <a:schemeClr val="accent1"/>
+          </a:effectRef>
+          <a:fontRef idx="minor">
+            <a:schemeClr val="lt1"/>
+          </a:fontRef>
+        </p:style>
+        <p:txBody>
+          <a:bodyPr rtlCol="0" anchor="ctr"/>
+          <a:lstStyle/>
+          <a:p>
+            <a:pPr algn="ctr"/>
+          </a:p>
+        </p:txBody>
+      </p:sp>
+      <p:sp>
+        <p:nvSpPr>
+          <p:cNvPr id="5" name="TextBox 4"/>
+          <p:cNvSpPr txBox="1"/>
+          <p:nvPr/>
+        </p:nvSpPr>
+        <p:spPr>
+          <a:xfrm>
+            <a:off x="500000" y="110000"/>
+            <a:ext cx="10300000" cy="300000"/>
+          </a:xfrm>
+          <a:prstGeom prst="rect">
+            <a:avLst/>
+          </a:prstGeom>
+          <a:noFill/>
+        </p:spPr>
+        <p:txBody>
+          <a:bodyPr wrap="square" anchor="t" lIns="50800" rIns="50800">
+            <a:spAutoFit/>
+          </a:bodyPr>
+          <a:lstStyle/>
+          <a:p>
+            <a:pPr algn="l"/>
+            <a:r>
+              <a:rPr sz="1200" b="1">
+                <a:solidFill>
+                  <a:srgbClr val="A9C4E6"/>
+                </a:solidFill>
+                <a:latin typeface="Calibri"/>
+              </a:rPr>
+              <a:t>4-REJA</a:t>
+            </a:r>
+          </a:p>
+        </p:txBody>
+      </p:sp>
+      <p:sp>
+        <p:nvSpPr>
+          <p:cNvPr id="6" name="TextBox 5"/>
+          <p:cNvSpPr txBox="1"/>
+          <p:nvPr/>
+        </p:nvSpPr>
+        <p:spPr>
+          <a:xfrm>
+            <a:off x="500000" y="330000"/>
+            <a:ext cx="10400000" cy="650000"/>
+          </a:xfrm>
+          <a:prstGeom prst="rect">
+            <a:avLst/>
+          </a:prstGeom>
+          <a:noFill/>
+        </p:spPr>
+        <p:txBody>
+          <a:bodyPr wrap="square" anchor="ctr" lIns="50800" rIns="50800">
+            <a:spAutoFit/>
+          </a:bodyPr>
+          <a:lstStyle/>
+          <a:p>
+            <a:pPr algn="l"/>
+            <a:r>
+              <a:rPr sz="2600" b="1">
+                <a:solidFill>
+                  <a:srgbClr val="FFFFFF"/>
+                </a:solidFill>
+                <a:latin typeface="Calibri"/>
+              </a:rPr>
+              <a:t>NVIDIA Jetson va Google Edge TPU platformalari</a:t>
+            </a:r>
+          </a:p>
+        </p:txBody>
+      </p:sp>
+      <p:sp>
+        <p:nvSpPr>
+          <p:cNvPr id="7" name="Rectangle 6"/>
+          <p:cNvSpPr/>
+          <p:nvPr/>
+        </p:nvSpPr>
+        <p:spPr>
+          <a:xfrm>
+            <a:off x="0" y="1000000"/>
+            <a:ext cx="12192000" cy="45000"/>
+          </a:xfrm>
+          <a:prstGeom prst="rect">
+            <a:avLst/>
+          </a:prstGeom>
+          <a:solidFill>
+            <a:srgbClr val="0F8B8D"/>
+          </a:solidFill>
+          <a:ln>
+            <a:noFill/>
+          </a:ln>
+          <a:effectLst/>
+        </p:spPr>
+        <p:style>
+          <a:lnRef idx="1">
+            <a:schemeClr val="accent1"/>
+          </a:lnRef>
+          <a:fillRef idx="3">
+            <a:schemeClr val="accent1"/>
+          </a:fillRef>
+          <a:effectRef idx="2">
+            <a:schemeClr val="accent1"/>
+          </a:effectRef>
+          <a:fontRef idx="minor">
+            <a:schemeClr val="lt1"/>
+          </a:fontRef>
+        </p:style>
+        <p:txBody>
+          <a:bodyPr rtlCol="0" anchor="ctr"/>
+          <a:lstStyle/>
+          <a:p>
+            <a:pPr algn="ctr"/>
+          </a:p>
+        </p:txBody>
+      </p:sp>
+      <p:sp>
+        <p:nvSpPr>
+          <p:cNvPr id="8" name="TextBox 7"/>
+          <p:cNvSpPr txBox="1"/>
+          <p:nvPr/>
+        </p:nvSpPr>
+        <p:spPr>
+          <a:xfrm>
+            <a:off x="500000" y="6420000"/>
+            <a:ext cx="9500000" cy="300000"/>
+          </a:xfrm>
+          <a:prstGeom prst="rect">
+            <a:avLst/>
+          </a:prstGeom>
+          <a:noFill/>
+        </p:spPr>
+        <p:txBody>
+          <a:bodyPr wrap="square" anchor="t" lIns="50800" rIns="50800">
+            <a:spAutoFit/>
+          </a:bodyPr>
+          <a:lstStyle/>
+          <a:p>
+            <a:pPr algn="l"/>
+            <a:r>
+              <a:rPr sz="1000" b="0">
+                <a:solidFill>
+                  <a:srgbClr val="5B6878"/>
+                </a:solidFill>
+                <a:latin typeface="Calibri"/>
+              </a:rPr>
+              <a:t>M6 · Edge AI va intellektual o'rnatilgan kompyuter tizimlari</a:t>
+            </a:r>
+          </a:p>
+        </p:txBody>
+      </p:sp>
+      <p:sp>
+        <p:nvSpPr>
+          <p:cNvPr id="9" name="TextBox 8"/>
+          <p:cNvSpPr txBox="1"/>
+          <p:nvPr/>
+        </p:nvSpPr>
+        <p:spPr>
+          <a:xfrm>
+            <a:off x="10600000" y="6420000"/>
+            <a:ext cx="1100000" cy="300000"/>
+          </a:xfrm>
+          <a:prstGeom prst="rect">
+            <a:avLst/>
+          </a:prstGeom>
+          <a:noFill/>
+        </p:spPr>
+        <p:txBody>
+          <a:bodyPr wrap="square" anchor="t" lIns="50800" rIns="50800">
+            <a:spAutoFit/>
+          </a:bodyPr>
+          <a:lstStyle/>
+          <a:p>
+            <a:pPr algn="r"/>
+            <a:r>
+              <a:rPr sz="1000" b="0">
+                <a:solidFill>
+                  <a:srgbClr val="5B6878"/>
+                </a:solidFill>
+                <a:latin typeface="Calibri"/>
+              </a:rPr>
+              <a:t>13</a:t>
             </a:r>
           </a:p>
         </p:txBody>
@@ -9947,7 +10498,7 @@
 </p:sld>
 </file>
 
-<file path=ppt/slides/slide13.xml><?xml version="1.0" encoding="utf-8"?>
+<file path=ppt/slides/slide14.xml><?xml version="1.0" encoding="utf-8"?>
 <p:sld xmlns:a="http://schemas.openxmlformats.org/drawingml/2006/main" xmlns:p="http://schemas.openxmlformats.org/presentationml/2006/main" xmlns:r="http://schemas.openxmlformats.org/officeDocument/2006/relationships">
   <p:cSld>
     <p:spTree>
@@ -10859,7 +11410,7 @@
 </p:sld>
 </file>
 
-<file path=ppt/slides/slide14.xml><?xml version="1.0" encoding="utf-8"?>
+<file path=ppt/slides/slide15.xml><?xml version="1.0" encoding="utf-8"?>
 <p:sld xmlns:a="http://schemas.openxmlformats.org/drawingml/2006/main" xmlns:p="http://schemas.openxmlformats.org/presentationml/2006/main" xmlns:r="http://schemas.openxmlformats.org/officeDocument/2006/relationships">
   <p:cSld>
     <p:spTree>
@@ -11188,7 +11739,7 @@
                 </a:solidFill>
                 <a:latin typeface="Calibri"/>
               </a:rPr>
-              <a:t>14</a:t>
+              <a:t>15</a:t>
             </a:r>
           </a:p>
         </p:txBody>
@@ -11201,12 +11752,12 @@
         </p:nvSpPr>
         <p:spPr>
           <a:xfrm>
-            <a:off x="550000" y="2076666"/>
-            <a:ext cx="11100000" cy="1250000"/>
+            <a:off x="550000" y="2250048"/>
+            <a:ext cx="11100000" cy="1469952"/>
           </a:xfrm>
           <a:prstGeom prst="roundRect">
             <a:avLst>
-              <a:gd name="adj" fmla="val 18000"/>
+              <a:gd name="adj" fmla="val 8000"/>
             </a:avLst>
           </a:prstGeom>
           <a:solidFill>
@@ -11247,8 +11798,8 @@
         </p:nvSpPr>
         <p:spPr>
           <a:xfrm>
-            <a:off x="550000" y="2076666"/>
-            <a:ext cx="70000" cy="1250000"/>
+            <a:off x="550000" y="2250048"/>
+            <a:ext cx="70000" cy="1469952"/>
           </a:xfrm>
           <a:prstGeom prst="rect">
             <a:avLst/>
@@ -11291,8 +11842,8 @@
         </p:nvSpPr>
         <p:spPr>
           <a:xfrm>
-            <a:off x="800000" y="2471666"/>
-            <a:ext cx="460000" cy="460000"/>
+            <a:off x="780000" y="2775024"/>
+            <a:ext cx="420000" cy="420000"/>
           </a:xfrm>
           <a:prstGeom prst="ellipse">
             <a:avLst/>
@@ -11325,7 +11876,7 @@
           <a:p>
             <a:pPr algn="ctr"/>
             <a:r>
-              <a:rPr sz="1600" b="1">
+              <a:rPr sz="1400" b="1">
                 <a:solidFill>
                   <a:srgbClr val="FFFFFF"/>
                 </a:solidFill>
@@ -11344,8 +11895,8 @@
         </p:nvSpPr>
         <p:spPr>
           <a:xfrm>
-            <a:off x="1450000" y="2076666"/>
-            <a:ext cx="10050000" cy="1250000"/>
+            <a:off x="1380000" y="2290048"/>
+            <a:ext cx="10150000" cy="1389952"/>
           </a:xfrm>
           <a:prstGeom prst="rect">
             <a:avLst/>
@@ -11353,20 +11904,35 @@
           <a:noFill/>
         </p:spPr>
         <p:txBody>
-          <a:bodyPr wrap="square" anchor="ctr" lIns="50800" rIns="50800">
+          <a:bodyPr wrap="square" anchor="ctr">
             <a:spAutoFit/>
           </a:bodyPr>
           <a:lstStyle/>
           <a:p>
-            <a:pPr algn="l"/>
             <a:r>
-              <a:rPr sz="1600" b="0">
+              <a:rPr sz="1800" b="1">
                 <a:solidFill>
-                  <a:srgbClr val="1B2430"/>
+                  <a:srgbClr val="1F3A5F"/>
                 </a:solidFill>
                 <a:latin typeface="Calibri"/>
               </a:rPr>
-              <a:t>Chekka qurilma uchun model tayyorlash odatda uch bosqichdan iborat. Birinchi — formatga o'tkazish: PyTorch → ONNX (torch.onnx.export) → ONNX Runtime (Jetson'da CUDA/TensorRT execution provider bilan) yoki TensorRT dvigateli; TensorFlow/Keras → TensorFlow Lite…</a:t>
+              <a:t>Chekka qurilma uchun model tayyorlash odatda uch bosqichdan iborat.</a:t>
+            </a:r>
+          </a:p>
+          <a:p>
+            <a:pPr>
+              <a:spcBef>
+                <a:spcPts val="400"/>
+              </a:spcBef>
+            </a:pPr>
+            <a:r>
+              <a:rPr sz="1700">
+                <a:solidFill>
+                  <a:srgbClr val="334055"/>
+                </a:solidFill>
+                <a:latin typeface="Calibri"/>
+              </a:rPr>
+              <a:t>Birinchi — formatga o'tkazish: PyTorch → ONNX (torch.onnx.export) → ONNX Runtime (Jetson'da CUDA/TensorRT execution provider bilan) yoki TensorRT dvigateli; TensorFlow/Keras → TensorFlow Lite (2024 yildan boshlab LiteRT nomi bilan) → Edge TPU kompilyatori yoki TFLM.</a:t>
             </a:r>
           </a:p>
         </p:txBody>
@@ -11379,12 +11945,12 @@
         </p:nvSpPr>
         <p:spPr>
           <a:xfrm>
-            <a:off x="550000" y="3446666"/>
-            <a:ext cx="11100000" cy="1250000"/>
+            <a:off x="550000" y="3830000"/>
+            <a:ext cx="11100000" cy="1469952"/>
           </a:xfrm>
           <a:prstGeom prst="roundRect">
             <a:avLst>
-              <a:gd name="adj" fmla="val 18000"/>
+              <a:gd name="adj" fmla="val 8000"/>
             </a:avLst>
           </a:prstGeom>
           <a:solidFill>
@@ -11425,8 +11991,8 @@
         </p:nvSpPr>
         <p:spPr>
           <a:xfrm>
-            <a:off x="550000" y="3446666"/>
-            <a:ext cx="70000" cy="1250000"/>
+            <a:off x="550000" y="3830000"/>
+            <a:ext cx="70000" cy="1469952"/>
           </a:xfrm>
           <a:prstGeom prst="rect">
             <a:avLst/>
@@ -11469,8 +12035,8 @@
         </p:nvSpPr>
         <p:spPr>
           <a:xfrm>
-            <a:off x="800000" y="3841666"/>
-            <a:ext cx="460000" cy="460000"/>
+            <a:off x="780000" y="4354976"/>
+            <a:ext cx="420000" cy="420000"/>
           </a:xfrm>
           <a:prstGeom prst="ellipse">
             <a:avLst/>
@@ -11503,7 +12069,7 @@
           <a:p>
             <a:pPr algn="ctr"/>
             <a:r>
-              <a:rPr sz="1600" b="1">
+              <a:rPr sz="1400" b="1">
                 <a:solidFill>
                   <a:srgbClr val="FFFFFF"/>
                 </a:solidFill>
@@ -11522,8 +12088,8 @@
         </p:nvSpPr>
         <p:spPr>
           <a:xfrm>
-            <a:off x="1450000" y="3446666"/>
-            <a:ext cx="10050000" cy="1250000"/>
+            <a:off x="1380000" y="3870000"/>
+            <a:ext cx="10150000" cy="1389952"/>
           </a:xfrm>
           <a:prstGeom prst="rect">
             <a:avLst/>
@@ -11531,14 +12097,13 @@
           <a:noFill/>
         </p:spPr>
         <p:txBody>
-          <a:bodyPr wrap="square" anchor="ctr" lIns="50800" rIns="50800">
+          <a:bodyPr wrap="square" anchor="ctr">
             <a:spAutoFit/>
           </a:bodyPr>
           <a:lstStyle/>
           <a:p>
-            <a:pPr algn="l"/>
             <a:r>
-              <a:rPr sz="1600" b="0">
+              <a:rPr sz="1700" b="0">
                 <a:solidFill>
                   <a:srgbClr val="1B2430"/>
                 </a:solidFill>
@@ -12377,7 +12942,7 @@
 </p:sld>
 </file>
 
-<file path=ppt/slides/slide15.xml><?xml version="1.0" encoding="utf-8"?>
+<file path=ppt/slides/slide16.xml><?xml version="1.0" encoding="utf-8"?>
 <p:sld xmlns:a="http://schemas.openxmlformats.org/drawingml/2006/main" xmlns:p="http://schemas.openxmlformats.org/presentationml/2006/main" xmlns:r="http://schemas.openxmlformats.org/officeDocument/2006/relationships">
   <p:cSld>
     <p:spTree>
@@ -13289,7 +13854,7 @@
 </p:sld>
 </file>
 
-<file path=ppt/slides/slide16.xml><?xml version="1.0" encoding="utf-8"?>
+<file path=ppt/slides/slide17.xml><?xml version="1.0" encoding="utf-8"?>
 <p:sld xmlns:a="http://schemas.openxmlformats.org/drawingml/2006/main" xmlns:p="http://schemas.openxmlformats.org/presentationml/2006/main" xmlns:r="http://schemas.openxmlformats.org/officeDocument/2006/relationships">
   <p:cSld>
     <p:spTree>
@@ -13618,7 +14183,7 @@
                 </a:solidFill>
                 <a:latin typeface="Calibri"/>
               </a:rPr>
-              <a:t>16</a:t>
+              <a:t>17</a:t>
             </a:r>
           </a:p>
         </p:txBody>
@@ -13631,12 +14196,12 @@
         </p:nvSpPr>
         <p:spPr>
           <a:xfrm>
-            <a:off x="550000" y="1620000"/>
-            <a:ext cx="11100000" cy="1250000"/>
+            <a:off x="550000" y="1284050"/>
+            <a:ext cx="11100000" cy="1587300"/>
           </a:xfrm>
           <a:prstGeom prst="roundRect">
             <a:avLst>
-              <a:gd name="adj" fmla="val 18000"/>
+              <a:gd name="adj" fmla="val 8000"/>
             </a:avLst>
           </a:prstGeom>
           <a:solidFill>
@@ -13677,8 +14242,8 @@
         </p:nvSpPr>
         <p:spPr>
           <a:xfrm>
-            <a:off x="550000" y="1620000"/>
-            <a:ext cx="70000" cy="1250000"/>
+            <a:off x="550000" y="1284050"/>
+            <a:ext cx="70000" cy="1587300"/>
           </a:xfrm>
           <a:prstGeom prst="rect">
             <a:avLst/>
@@ -13721,8 +14286,8 @@
         </p:nvSpPr>
         <p:spPr>
           <a:xfrm>
-            <a:off x="800000" y="2015000"/>
-            <a:ext cx="460000" cy="460000"/>
+            <a:off x="780000" y="1867700"/>
+            <a:ext cx="420000" cy="420000"/>
           </a:xfrm>
           <a:prstGeom prst="ellipse">
             <a:avLst/>
@@ -13755,7 +14320,7 @@
           <a:p>
             <a:pPr algn="ctr"/>
             <a:r>
-              <a:rPr sz="1600" b="1">
+              <a:rPr sz="1400" b="1">
                 <a:solidFill>
                   <a:srgbClr val="FFFFFF"/>
                 </a:solidFill>
@@ -13774,8 +14339,8 @@
         </p:nvSpPr>
         <p:spPr>
           <a:xfrm>
-            <a:off x="1450000" y="1620000"/>
-            <a:ext cx="10050000" cy="1250000"/>
+            <a:off x="1380000" y="1324050"/>
+            <a:ext cx="10150000" cy="1507300"/>
           </a:xfrm>
           <a:prstGeom prst="rect">
             <a:avLst/>
@@ -13783,22 +14348,37 @@
           <a:noFill/>
         </p:spPr>
         <p:txBody>
-          <a:bodyPr wrap="square" anchor="ctr" lIns="50800" rIns="50800">
+          <a:bodyPr wrap="square" anchor="ctr">
             <a:spAutoFit/>
           </a:bodyPr>
           <a:lstStyle/>
           <a:p>
-            <a:pPr algn="l"/>
             <a:r>
-              <a:rPr sz="1600" b="0">
+              <a:rPr sz="1600" b="1">
                 <a:solidFill>
-                  <a:srgbClr val="1B2430"/>
+                  <a:srgbClr val="1F3A5F"/>
                 </a:solidFill>
                 <a:latin typeface="Calibri"/>
               </a:rPr>
               <a:t>Internet buyumlari (IoT) tizimlarida chekka intellekt uch qatlamli arxitekturada ishlaydi: qurilmalar (sensorlar, kameralar, kontrollerlar) → shlyuz yoki chekka server (ma'lumot yig'ish, oldingi filtrlash, mahalliy inferens, vaqtincha saqlash) → bulut (uzoq…</a:t>
             </a:r>
           </a:p>
+          <a:p>
+            <a:pPr>
+              <a:spcBef>
+                <a:spcPts val="400"/>
+              </a:spcBef>
+            </a:pPr>
+            <a:r>
+              <a:rPr sz="1500">
+                <a:solidFill>
+                  <a:srgbClr val="334055"/>
+                </a:solidFill>
+                <a:latin typeface="Calibri"/>
+              </a:rPr>
+              <a:t>Aloqa protokollari: MQTT (yengil publish/subscribe, tarmoq uzilishiga chidamli), CoAP, AMQP, sanoatda OPC UA va Modbus.</a:t>
+            </a:r>
+          </a:p>
         </p:txBody>
       </p:sp>
       <p:sp>
@@ -13809,12 +14389,12 @@
         </p:nvSpPr>
         <p:spPr>
           <a:xfrm>
-            <a:off x="550000" y="2990000"/>
-            <a:ext cx="11100000" cy="1250000"/>
+            <a:off x="550000" y="2981350"/>
+            <a:ext cx="11100000" cy="1587300"/>
           </a:xfrm>
           <a:prstGeom prst="roundRect">
             <a:avLst>
-              <a:gd name="adj" fmla="val 18000"/>
+              <a:gd name="adj" fmla="val 8000"/>
             </a:avLst>
           </a:prstGeom>
           <a:solidFill>
@@ -13855,8 +14435,8 @@
         </p:nvSpPr>
         <p:spPr>
           <a:xfrm>
-            <a:off x="550000" y="2990000"/>
-            <a:ext cx="70000" cy="1250000"/>
+            <a:off x="550000" y="2981350"/>
+            <a:ext cx="70000" cy="1587300"/>
           </a:xfrm>
           <a:prstGeom prst="rect">
             <a:avLst/>
@@ -13899,8 +14479,8 @@
         </p:nvSpPr>
         <p:spPr>
           <a:xfrm>
-            <a:off x="800000" y="3385000"/>
-            <a:ext cx="460000" cy="460000"/>
+            <a:off x="780000" y="3565000"/>
+            <a:ext cx="420000" cy="420000"/>
           </a:xfrm>
           <a:prstGeom prst="ellipse">
             <a:avLst/>
@@ -13933,7 +14513,7 @@
           <a:p>
             <a:pPr algn="ctr"/>
             <a:r>
-              <a:rPr sz="1600" b="1">
+              <a:rPr sz="1400" b="1">
                 <a:solidFill>
                   <a:srgbClr val="FFFFFF"/>
                 </a:solidFill>
@@ -13952,8 +14532,8 @@
         </p:nvSpPr>
         <p:spPr>
           <a:xfrm>
-            <a:off x="1450000" y="2990000"/>
-            <a:ext cx="10050000" cy="1250000"/>
+            <a:off x="1380000" y="3021350"/>
+            <a:ext cx="10150000" cy="1507300"/>
           </a:xfrm>
           <a:prstGeom prst="rect">
             <a:avLst/>
@@ -13961,20 +14541,35 @@
           <a:noFill/>
         </p:spPr>
         <p:txBody>
-          <a:bodyPr wrap="square" anchor="ctr" lIns="50800" rIns="50800">
+          <a:bodyPr wrap="square" anchor="ctr">
             <a:spAutoFit/>
           </a:bodyPr>
           <a:lstStyle/>
           <a:p>
-            <a:pPr algn="l"/>
             <a:r>
-              <a:rPr sz="1600" b="0">
+              <a:rPr sz="1600" b="1">
                 <a:solidFill>
-                  <a:srgbClr val="1B2430"/>
+                  <a:srgbClr val="1F3A5F"/>
                 </a:solidFill>
                 <a:latin typeface="Calibri"/>
               </a:rPr>
-              <a:t>Model yangilash (OTA — over-the-air update) Edge AI'ning muhim tarkibiy qismi: model kuzatilgan ma'lumotda eskiradi (drift), yangi sinflar kerak bo'ladi, xatolar tuzatiladi. OTA tizimi versiyalash, imzolangan paketlar, bosqichma-bosqich tarqatish (canary) va…</a:t>
+              <a:t>Model yangilash (OTA — over-the-air update) Edge AI'ning muhim tarkibiy qismi: model kuzatilgan ma'lumotda eskiradi (drift), yangi sinflar kerak bo'ladi, xatolar tuzatiladi.</a:t>
+            </a:r>
+          </a:p>
+          <a:p>
+            <a:pPr>
+              <a:spcBef>
+                <a:spcPts val="400"/>
+              </a:spcBef>
+            </a:pPr>
+            <a:r>
+              <a:rPr sz="1500">
+                <a:solidFill>
+                  <a:srgbClr val="334055"/>
+                </a:solidFill>
+                <a:latin typeface="Calibri"/>
+              </a:rPr>
+              <a:t>OTA tizimi versiyalash, imzolangan paketlar, bosqichma-bosqich tarqatish (canary) va muvaffaqiyatsizlikda avtomatik orqaga qaytishni ta'minlashi kerak. Bu MLOps (M12) va xavfsizlik (M9) mavzulari bilan kesishadi.</a:t>
             </a:r>
           </a:p>
         </p:txBody>
@@ -13987,12 +14582,12 @@
         </p:nvSpPr>
         <p:spPr>
           <a:xfrm>
-            <a:off x="550000" y="4360000"/>
-            <a:ext cx="11100000" cy="1250000"/>
+            <a:off x="550000" y="4678650"/>
+            <a:ext cx="11100000" cy="1587300"/>
           </a:xfrm>
           <a:prstGeom prst="roundRect">
             <a:avLst>
-              <a:gd name="adj" fmla="val 18000"/>
+              <a:gd name="adj" fmla="val 8000"/>
             </a:avLst>
           </a:prstGeom>
           <a:solidFill>
@@ -14033,8 +14628,8 @@
         </p:nvSpPr>
         <p:spPr>
           <a:xfrm>
-            <a:off x="550000" y="4360000"/>
-            <a:ext cx="70000" cy="1250000"/>
+            <a:off x="550000" y="4678650"/>
+            <a:ext cx="70000" cy="1587300"/>
           </a:xfrm>
           <a:prstGeom prst="rect">
             <a:avLst/>
@@ -14077,8 +14672,8 @@
         </p:nvSpPr>
         <p:spPr>
           <a:xfrm>
-            <a:off x="800000" y="4755000"/>
-            <a:ext cx="460000" cy="460000"/>
+            <a:off x="780000" y="5262300"/>
+            <a:ext cx="420000" cy="420000"/>
           </a:xfrm>
           <a:prstGeom prst="ellipse">
             <a:avLst/>
@@ -14111,7 +14706,7 @@
           <a:p>
             <a:pPr algn="ctr"/>
             <a:r>
-              <a:rPr sz="1600" b="1">
+              <a:rPr sz="1400" b="1">
                 <a:solidFill>
                   <a:srgbClr val="FFFFFF"/>
                 </a:solidFill>
@@ -14130,8 +14725,8 @@
         </p:nvSpPr>
         <p:spPr>
           <a:xfrm>
-            <a:off x="1450000" y="4360000"/>
-            <a:ext cx="10050000" cy="1250000"/>
+            <a:off x="1380000" y="4718650"/>
+            <a:ext cx="10150000" cy="1507300"/>
           </a:xfrm>
           <a:prstGeom prst="rect">
             <a:avLst/>
@@ -14139,14 +14734,13 @@
           <a:noFill/>
         </p:spPr>
         <p:txBody>
-          <a:bodyPr wrap="square" anchor="ctr" lIns="50800" rIns="50800">
+          <a:bodyPr wrap="square" anchor="ctr">
             <a:spAutoFit/>
           </a:bodyPr>
           <a:lstStyle/>
           <a:p>
-            <a:pPr algn="l"/>
             <a:r>
-              <a:rPr sz="1600" b="0">
+              <a:rPr sz="1500" b="0">
                 <a:solidFill>
                   <a:srgbClr val="1B2430"/>
                 </a:solidFill>
@@ -15349,7 +15943,7 @@
 </p:sld>
 </file>
 
-<file path=ppt/slides/slide17.xml><?xml version="1.0" encoding="utf-8"?>
+<file path=ppt/slides/slide18.xml><?xml version="1.0" encoding="utf-8"?>
 <p:sld xmlns:a="http://schemas.openxmlformats.org/drawingml/2006/main" xmlns:p="http://schemas.openxmlformats.org/presentationml/2006/main" xmlns:r="http://schemas.openxmlformats.org/officeDocument/2006/relationships">
   <p:cSld>
     <p:spTree>
@@ -15678,7 +16272,7 @@
                 </a:solidFill>
                 <a:latin typeface="Calibri"/>
               </a:rPr>
-              <a:t>17</a:t>
+              <a:t>18</a:t>
             </a:r>
           </a:p>
         </p:txBody>
@@ -16398,7 +16992,7 @@
 </p:sld>
 </file>
 
-<file path=ppt/slides/slide18.xml><?xml version="1.0" encoding="utf-8"?>
+<file path=ppt/slides/slide19.xml><?xml version="1.0" encoding="utf-8"?>
 <p:sld xmlns:a="http://schemas.openxmlformats.org/drawingml/2006/main" xmlns:p="http://schemas.openxmlformats.org/presentationml/2006/main" xmlns:r="http://schemas.openxmlformats.org/officeDocument/2006/relationships">
   <p:cSld>
     <p:spTree>
@@ -17324,8 +17918,8 @@
         </p:nvSpPr>
         <p:spPr>
           <a:xfrm>
-            <a:off x="550000" y="1300000"/>
-            <a:ext cx="11100000" cy="725000"/>
+            <a:off x="550000" y="1940000"/>
+            <a:ext cx="11100000" cy="520000"/>
           </a:xfrm>
           <a:prstGeom prst="roundRect">
             <a:avLst>
@@ -17370,8 +17964,8 @@
         </p:nvSpPr>
         <p:spPr>
           <a:xfrm>
-            <a:off x="550000" y="1300000"/>
-            <a:ext cx="70000" cy="725000"/>
+            <a:off x="550000" y="1940000"/>
+            <a:ext cx="70000" cy="520000"/>
           </a:xfrm>
           <a:prstGeom prst="rect">
             <a:avLst/>
@@ -17414,8 +18008,8 @@
         </p:nvSpPr>
         <p:spPr>
           <a:xfrm>
-            <a:off x="800000" y="1432500"/>
-            <a:ext cx="460000" cy="460000"/>
+            <a:off x="780000" y="2010000"/>
+            <a:ext cx="380000" cy="380000"/>
           </a:xfrm>
           <a:prstGeom prst="ellipse">
             <a:avLst/>
@@ -17448,7 +18042,7 @@
           <a:p>
             <a:pPr algn="ctr"/>
             <a:r>
-              <a:rPr sz="1600" b="1">
+              <a:rPr sz="1400" b="1">
                 <a:solidFill>
                   <a:srgbClr val="FFFFFF"/>
                 </a:solidFill>
@@ -17467,8 +18061,8 @@
         </p:nvSpPr>
         <p:spPr>
           <a:xfrm>
-            <a:off x="1450000" y="1300000"/>
-            <a:ext cx="10050000" cy="725000"/>
+            <a:off x="1380000" y="1980000"/>
+            <a:ext cx="10150000" cy="440000"/>
           </a:xfrm>
           <a:prstGeom prst="rect">
             <a:avLst/>
@@ -17476,14 +18070,13 @@
           <a:noFill/>
         </p:spPr>
         <p:txBody>
-          <a:bodyPr wrap="square" anchor="ctr" lIns="50800" rIns="50800">
+          <a:bodyPr wrap="square" anchor="ctr">
             <a:spAutoFit/>
           </a:bodyPr>
           <a:lstStyle/>
           <a:p>
-            <a:pPr algn="l"/>
             <a:r>
-              <a:rPr sz="1900" b="0">
+              <a:rPr sz="1600" b="0">
                 <a:solidFill>
                   <a:srgbClr val="1B2430"/>
                 </a:solidFill>
@@ -17502,8 +18095,8 @@
         </p:nvSpPr>
         <p:spPr>
           <a:xfrm>
-            <a:off x="550000" y="2145000"/>
-            <a:ext cx="11100000" cy="725000"/>
+            <a:off x="550000" y="2570000"/>
+            <a:ext cx="11100000" cy="520000"/>
           </a:xfrm>
           <a:prstGeom prst="roundRect">
             <a:avLst>
@@ -17548,8 +18141,8 @@
         </p:nvSpPr>
         <p:spPr>
           <a:xfrm>
-            <a:off x="550000" y="2145000"/>
-            <a:ext cx="70000" cy="725000"/>
+            <a:off x="550000" y="2570000"/>
+            <a:ext cx="70000" cy="520000"/>
           </a:xfrm>
           <a:prstGeom prst="rect">
             <a:avLst/>
@@ -17592,8 +18185,8 @@
         </p:nvSpPr>
         <p:spPr>
           <a:xfrm>
-            <a:off x="800000" y="2277500"/>
-            <a:ext cx="460000" cy="460000"/>
+            <a:off x="780000" y="2640000"/>
+            <a:ext cx="380000" cy="380000"/>
           </a:xfrm>
           <a:prstGeom prst="ellipse">
             <a:avLst/>
@@ -17626,7 +18219,7 @@
           <a:p>
             <a:pPr algn="ctr"/>
             <a:r>
-              <a:rPr sz="1600" b="1">
+              <a:rPr sz="1400" b="1">
                 <a:solidFill>
                   <a:srgbClr val="FFFFFF"/>
                 </a:solidFill>
@@ -17645,8 +18238,8 @@
         </p:nvSpPr>
         <p:spPr>
           <a:xfrm>
-            <a:off x="1450000" y="2145000"/>
-            <a:ext cx="10050000" cy="725000"/>
+            <a:off x="1380000" y="2610000"/>
+            <a:ext cx="10150000" cy="440000"/>
           </a:xfrm>
           <a:prstGeom prst="rect">
             <a:avLst/>
@@ -17654,14 +18247,13 @@
           <a:noFill/>
         </p:spPr>
         <p:txBody>
-          <a:bodyPr wrap="square" anchor="ctr" lIns="50800" rIns="50800">
+          <a:bodyPr wrap="square" anchor="ctr">
             <a:spAutoFit/>
           </a:bodyPr>
           <a:lstStyle/>
           <a:p>
-            <a:pPr algn="l"/>
             <a:r>
-              <a:rPr sz="1900" b="0">
+              <a:rPr sz="1600" b="0">
                 <a:solidFill>
                   <a:srgbClr val="1B2430"/>
                 </a:solidFill>
@@ -17680,8 +18272,8 @@
         </p:nvSpPr>
         <p:spPr>
           <a:xfrm>
-            <a:off x="550000" y="2990000"/>
-            <a:ext cx="11100000" cy="725000"/>
+            <a:off x="550000" y="3200000"/>
+            <a:ext cx="11100000" cy="520000"/>
           </a:xfrm>
           <a:prstGeom prst="roundRect">
             <a:avLst>
@@ -17726,8 +18318,8 @@
         </p:nvSpPr>
         <p:spPr>
           <a:xfrm>
-            <a:off x="550000" y="2990000"/>
-            <a:ext cx="70000" cy="725000"/>
+            <a:off x="550000" y="3200000"/>
+            <a:ext cx="70000" cy="520000"/>
           </a:xfrm>
           <a:prstGeom prst="rect">
             <a:avLst/>
@@ -17770,8 +18362,8 @@
         </p:nvSpPr>
         <p:spPr>
           <a:xfrm>
-            <a:off x="800000" y="3122500"/>
-            <a:ext cx="460000" cy="460000"/>
+            <a:off x="780000" y="3270000"/>
+            <a:ext cx="380000" cy="380000"/>
           </a:xfrm>
           <a:prstGeom prst="ellipse">
             <a:avLst/>
@@ -17804,7 +18396,7 @@
           <a:p>
             <a:pPr algn="ctr"/>
             <a:r>
-              <a:rPr sz="1600" b="1">
+              <a:rPr sz="1400" b="1">
                 <a:solidFill>
                   <a:srgbClr val="FFFFFF"/>
                 </a:solidFill>
@@ -17823,8 +18415,8 @@
         </p:nvSpPr>
         <p:spPr>
           <a:xfrm>
-            <a:off x="1450000" y="2990000"/>
-            <a:ext cx="10050000" cy="725000"/>
+            <a:off x="1380000" y="3240000"/>
+            <a:ext cx="10150000" cy="440000"/>
           </a:xfrm>
           <a:prstGeom prst="rect">
             <a:avLst/>
@@ -17832,14 +18424,13 @@
           <a:noFill/>
         </p:spPr>
         <p:txBody>
-          <a:bodyPr wrap="square" anchor="ctr" lIns="50800" rIns="50800">
+          <a:bodyPr wrap="square" anchor="ctr">
             <a:spAutoFit/>
           </a:bodyPr>
           <a:lstStyle/>
           <a:p>
-            <a:pPr algn="l"/>
             <a:r>
-              <a:rPr sz="1900" b="0">
+              <a:rPr sz="1600" b="0">
                 <a:solidFill>
                   <a:srgbClr val="1B2430"/>
                 </a:solidFill>
@@ -17858,8 +18449,8 @@
         </p:nvSpPr>
         <p:spPr>
           <a:xfrm>
-            <a:off x="550000" y="3835000"/>
-            <a:ext cx="11100000" cy="725000"/>
+            <a:off x="550000" y="3830000"/>
+            <a:ext cx="11100000" cy="520000"/>
           </a:xfrm>
           <a:prstGeom prst="roundRect">
             <a:avLst>
@@ -17904,8 +18495,8 @@
         </p:nvSpPr>
         <p:spPr>
           <a:xfrm>
-            <a:off x="550000" y="3835000"/>
-            <a:ext cx="70000" cy="725000"/>
+            <a:off x="550000" y="3830000"/>
+            <a:ext cx="70000" cy="520000"/>
           </a:xfrm>
           <a:prstGeom prst="rect">
             <a:avLst/>
@@ -17948,8 +18539,8 @@
         </p:nvSpPr>
         <p:spPr>
           <a:xfrm>
-            <a:off x="800000" y="3967500"/>
-            <a:ext cx="460000" cy="460000"/>
+            <a:off x="780000" y="3900000"/>
+            <a:ext cx="380000" cy="380000"/>
           </a:xfrm>
           <a:prstGeom prst="ellipse">
             <a:avLst/>
@@ -17982,7 +18573,7 @@
           <a:p>
             <a:pPr algn="ctr"/>
             <a:r>
-              <a:rPr sz="1600" b="1">
+              <a:rPr sz="1400" b="1">
                 <a:solidFill>
                   <a:srgbClr val="FFFFFF"/>
                 </a:solidFill>
@@ -18001,8 +18592,8 @@
         </p:nvSpPr>
         <p:spPr>
           <a:xfrm>
-            <a:off x="1450000" y="3835000"/>
-            <a:ext cx="10050000" cy="725000"/>
+            <a:off x="1380000" y="3870000"/>
+            <a:ext cx="10150000" cy="440000"/>
           </a:xfrm>
           <a:prstGeom prst="rect">
             <a:avLst/>
@@ -18010,14 +18601,13 @@
           <a:noFill/>
         </p:spPr>
         <p:txBody>
-          <a:bodyPr wrap="square" anchor="ctr" lIns="50800" rIns="50800">
+          <a:bodyPr wrap="square" anchor="ctr">
             <a:spAutoFit/>
           </a:bodyPr>
           <a:lstStyle/>
           <a:p>
-            <a:pPr algn="l"/>
             <a:r>
-              <a:rPr sz="1900" b="0">
+              <a:rPr sz="1600" b="0">
                 <a:solidFill>
                   <a:srgbClr val="1B2430"/>
                 </a:solidFill>
@@ -18036,8 +18626,8 @@
         </p:nvSpPr>
         <p:spPr>
           <a:xfrm>
-            <a:off x="550000" y="4680000"/>
-            <a:ext cx="11100000" cy="725000"/>
+            <a:off x="550000" y="4460000"/>
+            <a:ext cx="11100000" cy="520000"/>
           </a:xfrm>
           <a:prstGeom prst="roundRect">
             <a:avLst>
@@ -18082,8 +18672,8 @@
         </p:nvSpPr>
         <p:spPr>
           <a:xfrm>
-            <a:off x="550000" y="4680000"/>
-            <a:ext cx="70000" cy="725000"/>
+            <a:off x="550000" y="4460000"/>
+            <a:ext cx="70000" cy="520000"/>
           </a:xfrm>
           <a:prstGeom prst="rect">
             <a:avLst/>
@@ -18126,8 +18716,8 @@
         </p:nvSpPr>
         <p:spPr>
           <a:xfrm>
-            <a:off x="800000" y="4812500"/>
-            <a:ext cx="460000" cy="460000"/>
+            <a:off x="780000" y="4530000"/>
+            <a:ext cx="380000" cy="380000"/>
           </a:xfrm>
           <a:prstGeom prst="ellipse">
             <a:avLst/>
@@ -18160,7 +18750,7 @@
           <a:p>
             <a:pPr algn="ctr"/>
             <a:r>
-              <a:rPr sz="1600" b="1">
+              <a:rPr sz="1400" b="1">
                 <a:solidFill>
                   <a:srgbClr val="FFFFFF"/>
                 </a:solidFill>
@@ -18179,8 +18769,8 @@
         </p:nvSpPr>
         <p:spPr>
           <a:xfrm>
-            <a:off x="1450000" y="4680000"/>
-            <a:ext cx="10050000" cy="725000"/>
+            <a:off x="1380000" y="4500000"/>
+            <a:ext cx="10150000" cy="440000"/>
           </a:xfrm>
           <a:prstGeom prst="rect">
             <a:avLst/>
@@ -18188,14 +18778,13 @@
           <a:noFill/>
         </p:spPr>
         <p:txBody>
-          <a:bodyPr wrap="square" anchor="ctr" lIns="50800" rIns="50800">
+          <a:bodyPr wrap="square" anchor="ctr">
             <a:spAutoFit/>
           </a:bodyPr>
           <a:lstStyle/>
           <a:p>
-            <a:pPr algn="l"/>
             <a:r>
-              <a:rPr sz="1900" b="0">
+              <a:rPr sz="1600" b="0">
                 <a:solidFill>
                   <a:srgbClr val="1B2430"/>
                 </a:solidFill>
@@ -18214,8 +18803,8 @@
         </p:nvSpPr>
         <p:spPr>
           <a:xfrm>
-            <a:off x="550000" y="5525000"/>
-            <a:ext cx="11100000" cy="725000"/>
+            <a:off x="550000" y="5090000"/>
+            <a:ext cx="11100000" cy="520000"/>
           </a:xfrm>
           <a:prstGeom prst="roundRect">
             <a:avLst>
@@ -18260,8 +18849,8 @@
         </p:nvSpPr>
         <p:spPr>
           <a:xfrm>
-            <a:off x="550000" y="5525000"/>
-            <a:ext cx="70000" cy="725000"/>
+            <a:off x="550000" y="5090000"/>
+            <a:ext cx="70000" cy="520000"/>
           </a:xfrm>
           <a:prstGeom prst="rect">
             <a:avLst/>
@@ -18304,8 +18893,8 @@
         </p:nvSpPr>
         <p:spPr>
           <a:xfrm>
-            <a:off x="800000" y="5657500"/>
-            <a:ext cx="460000" cy="460000"/>
+            <a:off x="780000" y="5160000"/>
+            <a:ext cx="380000" cy="380000"/>
           </a:xfrm>
           <a:prstGeom prst="ellipse">
             <a:avLst/>
@@ -18338,7 +18927,7 @@
           <a:p>
             <a:pPr algn="ctr"/>
             <a:r>
-              <a:rPr sz="1600" b="1">
+              <a:rPr sz="1400" b="1">
                 <a:solidFill>
                   <a:srgbClr val="FFFFFF"/>
                 </a:solidFill>
@@ -18357,8 +18946,8 @@
         </p:nvSpPr>
         <p:spPr>
           <a:xfrm>
-            <a:off x="1450000" y="5525000"/>
-            <a:ext cx="10050000" cy="725000"/>
+            <a:off x="1380000" y="5130000"/>
+            <a:ext cx="10150000" cy="440000"/>
           </a:xfrm>
           <a:prstGeom prst="rect">
             <a:avLst/>
@@ -18366,14 +18955,13 @@
           <a:noFill/>
         </p:spPr>
         <p:txBody>
-          <a:bodyPr wrap="square" anchor="ctr" lIns="50800" rIns="50800">
+          <a:bodyPr wrap="square" anchor="ctr">
             <a:spAutoFit/>
           </a:bodyPr>
           <a:lstStyle/>
           <a:p>
-            <a:pPr algn="l"/>
             <a:r>
-              <a:rPr sz="1900" b="0">
+              <a:rPr sz="1600" b="0">
                 <a:solidFill>
                   <a:srgbClr val="1B2430"/>
                 </a:solidFill>
@@ -21922,12 +22510,12 @@
         </p:nvSpPr>
         <p:spPr>
           <a:xfrm>
-            <a:off x="550000" y="2076666"/>
-            <a:ext cx="11100000" cy="1250000"/>
+            <a:off x="550000" y="2384160"/>
+            <a:ext cx="11100000" cy="1335840"/>
           </a:xfrm>
           <a:prstGeom prst="roundRect">
             <a:avLst>
-              <a:gd name="adj" fmla="val 18000"/>
+              <a:gd name="adj" fmla="val 8000"/>
             </a:avLst>
           </a:prstGeom>
           <a:solidFill>
@@ -21968,8 +22556,8 @@
         </p:nvSpPr>
         <p:spPr>
           <a:xfrm>
-            <a:off x="550000" y="2076666"/>
-            <a:ext cx="70000" cy="1250000"/>
+            <a:off x="550000" y="2384160"/>
+            <a:ext cx="70000" cy="1335840"/>
           </a:xfrm>
           <a:prstGeom prst="rect">
             <a:avLst/>
@@ -22012,8 +22600,8 @@
         </p:nvSpPr>
         <p:spPr>
           <a:xfrm>
-            <a:off x="800000" y="2471666"/>
-            <a:ext cx="460000" cy="460000"/>
+            <a:off x="780000" y="2842080"/>
+            <a:ext cx="420000" cy="420000"/>
           </a:xfrm>
           <a:prstGeom prst="ellipse">
             <a:avLst/>
@@ -22046,7 +22634,7 @@
           <a:p>
             <a:pPr algn="ctr"/>
             <a:r>
-              <a:rPr sz="1600" b="1">
+              <a:rPr sz="1400" b="1">
                 <a:solidFill>
                   <a:srgbClr val="FFFFFF"/>
                 </a:solidFill>
@@ -22065,8 +22653,8 @@
         </p:nvSpPr>
         <p:spPr>
           <a:xfrm>
-            <a:off x="1450000" y="2076666"/>
-            <a:ext cx="10050000" cy="1250000"/>
+            <a:off x="1380000" y="2424160"/>
+            <a:ext cx="10150000" cy="1255840"/>
           </a:xfrm>
           <a:prstGeom prst="rect">
             <a:avLst/>
@@ -22074,20 +22662,35 @@
           <a:noFill/>
         </p:spPr>
         <p:txBody>
-          <a:bodyPr wrap="square" anchor="ctr" lIns="50800" rIns="50800">
+          <a:bodyPr wrap="square" anchor="ctr">
             <a:spAutoFit/>
           </a:bodyPr>
           <a:lstStyle/>
           <a:p>
-            <a:pPr algn="l"/>
             <a:r>
-              <a:rPr sz="1600" b="0">
+              <a:rPr sz="1600" b="1">
                 <a:solidFill>
-                  <a:srgbClr val="1B2430"/>
+                  <a:srgbClr val="1F3A5F"/>
                 </a:solidFill>
                 <a:latin typeface="Calibri"/>
               </a:rPr>
-              <a:t>Zamonaviy intellektual tizimlarda hisoblash bir nechta darajaga taqsimlanadi. Bulut (cloud) — model o'qitish, katta modellar, tarixiy tahlil.</a:t>
+              <a:t>Zamonaviy intellektual tizimlarda hisoblash bir nechta darajaga taqsimlanadi.</a:t>
+            </a:r>
+          </a:p>
+          <a:p>
+            <a:pPr>
+              <a:spcBef>
+                <a:spcPts val="400"/>
+              </a:spcBef>
+            </a:pPr>
+            <a:r>
+              <a:rPr sz="1500">
+                <a:solidFill>
+                  <a:srgbClr val="334055"/>
+                </a:solidFill>
+                <a:latin typeface="Calibri"/>
+              </a:rPr>
+              <a:t>Bulut (cloud) — model o'qitish, katta modellar, tarixiy tahlil. Tuman yoki chekka server (fog / edge server) — zavod, kasalxona yoki telekom bazaviy stansiyasidagi kichik server (masalan, bir nechta L4 yoki Jetson AGX Orin bilan), o'nlab kameralarni qayta ishlaydi.</a:t>
             </a:r>
           </a:p>
         </p:txBody>
@@ -22100,12 +22703,12 @@
         </p:nvSpPr>
         <p:spPr>
           <a:xfrm>
-            <a:off x="550000" y="3446666"/>
-            <a:ext cx="11100000" cy="1250000"/>
+            <a:off x="550000" y="3830000"/>
+            <a:ext cx="11100000" cy="1335840"/>
           </a:xfrm>
           <a:prstGeom prst="roundRect">
             <a:avLst>
-              <a:gd name="adj" fmla="val 18000"/>
+              <a:gd name="adj" fmla="val 8000"/>
             </a:avLst>
           </a:prstGeom>
           <a:solidFill>
@@ -22146,8 +22749,8 @@
         </p:nvSpPr>
         <p:spPr>
           <a:xfrm>
-            <a:off x="550000" y="3446666"/>
-            <a:ext cx="70000" cy="1250000"/>
+            <a:off x="550000" y="3830000"/>
+            <a:ext cx="70000" cy="1335840"/>
           </a:xfrm>
           <a:prstGeom prst="rect">
             <a:avLst/>
@@ -22190,8 +22793,8 @@
         </p:nvSpPr>
         <p:spPr>
           <a:xfrm>
-            <a:off x="800000" y="3841666"/>
-            <a:ext cx="460000" cy="460000"/>
+            <a:off x="780000" y="4287920"/>
+            <a:ext cx="420000" cy="420000"/>
           </a:xfrm>
           <a:prstGeom prst="ellipse">
             <a:avLst/>
@@ -22224,7 +22827,7 @@
           <a:p>
             <a:pPr algn="ctr"/>
             <a:r>
-              <a:rPr sz="1600" b="1">
+              <a:rPr sz="1400" b="1">
                 <a:solidFill>
                   <a:srgbClr val="FFFFFF"/>
                 </a:solidFill>
@@ -22243,8 +22846,8 @@
         </p:nvSpPr>
         <p:spPr>
           <a:xfrm>
-            <a:off x="1450000" y="3446666"/>
-            <a:ext cx="10050000" cy="1250000"/>
+            <a:off x="1380000" y="3870000"/>
+            <a:ext cx="10150000" cy="1255840"/>
           </a:xfrm>
           <a:prstGeom prst="rect">
             <a:avLst/>
@@ -22252,20 +22855,35 @@
           <a:noFill/>
         </p:spPr>
         <p:txBody>
-          <a:bodyPr wrap="square" anchor="ctr" lIns="50800" rIns="50800">
+          <a:bodyPr wrap="square" anchor="ctr">
             <a:spAutoFit/>
           </a:bodyPr>
           <a:lstStyle/>
           <a:p>
-            <a:pPr algn="l"/>
             <a:r>
-              <a:rPr sz="1600" b="0">
+              <a:rPr sz="1600" b="1">
                 <a:solidFill>
-                  <a:srgbClr val="1B2430"/>
+                  <a:srgbClr val="1F3A5F"/>
                 </a:solidFill>
                 <a:latin typeface="Calibri"/>
               </a:rPr>
-              <a:t>Edge AI konsepsiyasining asosiy tamoyili — ma'lumotni emas, qarorni uzatish. Kamera xom videoni emas, «konveyerda nuqsonli mahsulot №4471» degan hodisani yuboradi; bu uzatish hajmini ming martalab kamaytiradi va qaror kechikishini millisekundlar darajasiga…</a:t>
+              <a:t>Edge AI konsepsiyasining asosiy tamoyili — ma'lumotni emas, qarorni uzatish.</a:t>
+            </a:r>
+          </a:p>
+          <a:p>
+            <a:pPr>
+              <a:spcBef>
+                <a:spcPts val="400"/>
+              </a:spcBef>
+            </a:pPr>
+            <a:r>
+              <a:rPr sz="1500">
+                <a:solidFill>
+                  <a:srgbClr val="334055"/>
+                </a:solidFill>
+                <a:latin typeface="Calibri"/>
+              </a:rPr>
+              <a:t>Kamera xom videoni emas, «konveyerda nuqsonli mahsulot №4471» degan hodisani yuboradi; bu uzatish hajmini ming martalab kamaytiradi va qaror kechikishini millisekundlar darajasiga tushiradi.</a:t>
             </a:r>
           </a:p>
         </p:txBody>
@@ -25530,12 +26148,12 @@
         </p:nvSpPr>
         <p:spPr>
           <a:xfrm>
-            <a:off x="550000" y="1620000"/>
-            <a:ext cx="11100000" cy="1250000"/>
+            <a:off x="550000" y="1409780"/>
+            <a:ext cx="11100000" cy="1503480"/>
           </a:xfrm>
           <a:prstGeom prst="roundRect">
             <a:avLst>
-              <a:gd name="adj" fmla="val 18000"/>
+              <a:gd name="adj" fmla="val 8000"/>
             </a:avLst>
           </a:prstGeom>
           <a:solidFill>
@@ -25576,8 +26194,8 @@
         </p:nvSpPr>
         <p:spPr>
           <a:xfrm>
-            <a:off x="550000" y="1620000"/>
-            <a:ext cx="70000" cy="1250000"/>
+            <a:off x="550000" y="1409780"/>
+            <a:ext cx="70000" cy="1503480"/>
           </a:xfrm>
           <a:prstGeom prst="rect">
             <a:avLst/>
@@ -25620,8 +26238,8 @@
         </p:nvSpPr>
         <p:spPr>
           <a:xfrm>
-            <a:off x="800000" y="2015000"/>
-            <a:ext cx="460000" cy="460000"/>
+            <a:off x="780000" y="1951520"/>
+            <a:ext cx="420000" cy="420000"/>
           </a:xfrm>
           <a:prstGeom prst="ellipse">
             <a:avLst/>
@@ -25654,7 +26272,7 @@
           <a:p>
             <a:pPr algn="ctr"/>
             <a:r>
-              <a:rPr sz="1600" b="1">
+              <a:rPr sz="1400" b="1">
                 <a:solidFill>
                   <a:srgbClr val="FFFFFF"/>
                 </a:solidFill>
@@ -25673,8 +26291,8 @@
         </p:nvSpPr>
         <p:spPr>
           <a:xfrm>
-            <a:off x="1450000" y="1620000"/>
-            <a:ext cx="10050000" cy="1250000"/>
+            <a:off x="1380000" y="1449780"/>
+            <a:ext cx="10150000" cy="1423480"/>
           </a:xfrm>
           <a:prstGeom prst="rect">
             <a:avLst/>
@@ -25682,20 +26300,35 @@
           <a:noFill/>
         </p:spPr>
         <p:txBody>
-          <a:bodyPr wrap="square" anchor="ctr" lIns="50800" rIns="50800">
+          <a:bodyPr wrap="square" anchor="ctr">
             <a:spAutoFit/>
           </a:bodyPr>
           <a:lstStyle/>
           <a:p>
-            <a:pPr algn="l"/>
             <a:r>
-              <a:rPr sz="1600" b="0">
+              <a:rPr sz="1500" b="1">
                 <a:solidFill>
-                  <a:srgbClr val="1B2430"/>
+                  <a:srgbClr val="1F3A5F"/>
                 </a:solidFill>
                 <a:latin typeface="Calibri"/>
               </a:rPr>
-              <a:t>O'rnatilgan tizim (embedded system) — muayyan funksiyani bajarish uchun qurilma ichiga joylashtirilgan ixtisoslashgan kompyuter. Unga sun'iy intellekt qo'shilganda «Embedded AI» yoki «intellektual o'rnatilgan tizim» paydo bo'ladi.</a:t>
+              <a:t>O'rnatilgan tizim (embedded system) — muayyan funksiyani bajarish uchun qurilma ichiga joylashtirilgan ixtisoslashgan kompyuter.</a:t>
+            </a:r>
+          </a:p>
+          <a:p>
+            <a:pPr>
+              <a:spcBef>
+                <a:spcPts val="400"/>
+              </a:spcBef>
+            </a:pPr>
+            <a:r>
+              <a:rPr sz="1400">
+                <a:solidFill>
+                  <a:srgbClr val="334055"/>
+                </a:solidFill>
+                <a:latin typeface="Calibri"/>
+              </a:rPr>
+              <a:t>Unga sun'iy intellekt qo'shilganda «Embedded AI» yoki «intellektual o'rnatilgan tizim» paydo bo'ladi. Oddiy o'rnatilgan tizimdan farqi — xulq-atvor qoidalar bilan emas, ma'lumotdan o'rganilgan model bilan belgilanadi, bu esa tekshirish (verification) va ishonchlilik masalalarini murakkablashtiradi.</a:t>
             </a:r>
           </a:p>
         </p:txBody>
@@ -25708,12 +26341,12 @@
         </p:nvSpPr>
         <p:spPr>
           <a:xfrm>
-            <a:off x="550000" y="2990000"/>
-            <a:ext cx="11100000" cy="1250000"/>
+            <a:off x="550000" y="3023260"/>
+            <a:ext cx="11100000" cy="1503480"/>
           </a:xfrm>
           <a:prstGeom prst="roundRect">
             <a:avLst>
-              <a:gd name="adj" fmla="val 18000"/>
+              <a:gd name="adj" fmla="val 8000"/>
             </a:avLst>
           </a:prstGeom>
           <a:solidFill>
@@ -25754,8 +26387,8 @@
         </p:nvSpPr>
         <p:spPr>
           <a:xfrm>
-            <a:off x="550000" y="2990000"/>
-            <a:ext cx="70000" cy="1250000"/>
+            <a:off x="550000" y="3023260"/>
+            <a:ext cx="70000" cy="1503480"/>
           </a:xfrm>
           <a:prstGeom prst="rect">
             <a:avLst/>
@@ -25798,8 +26431,8 @@
         </p:nvSpPr>
         <p:spPr>
           <a:xfrm>
-            <a:off x="800000" y="3385000"/>
-            <a:ext cx="460000" cy="460000"/>
+            <a:off x="780000" y="3565000"/>
+            <a:ext cx="420000" cy="420000"/>
           </a:xfrm>
           <a:prstGeom prst="ellipse">
             <a:avLst/>
@@ -25832,7 +26465,7 @@
           <a:p>
             <a:pPr algn="ctr"/>
             <a:r>
-              <a:rPr sz="1600" b="1">
+              <a:rPr sz="1400" b="1">
                 <a:solidFill>
                   <a:srgbClr val="FFFFFF"/>
                 </a:solidFill>
@@ -25851,8 +26484,8 @@
         </p:nvSpPr>
         <p:spPr>
           <a:xfrm>
-            <a:off x="1450000" y="2990000"/>
-            <a:ext cx="10050000" cy="1250000"/>
+            <a:off x="1380000" y="3063260"/>
+            <a:ext cx="10150000" cy="1423480"/>
           </a:xfrm>
           <a:prstGeom prst="rect">
             <a:avLst/>
@@ -25860,20 +26493,35 @@
           <a:noFill/>
         </p:spPr>
         <p:txBody>
-          <a:bodyPr wrap="square" anchor="ctr" lIns="50800" rIns="50800">
+          <a:bodyPr wrap="square" anchor="ctr">
             <a:spAutoFit/>
           </a:bodyPr>
           <a:lstStyle/>
           <a:p>
-            <a:pPr algn="l"/>
             <a:r>
-              <a:rPr sz="1600" b="0">
+              <a:rPr sz="1500" b="1">
                 <a:solidFill>
-                  <a:srgbClr val="1B2430"/>
+                  <a:srgbClr val="1F3A5F"/>
                 </a:solidFill>
                 <a:latin typeface="Calibri"/>
               </a:rPr>
-              <a:t>Real vaqt rejimida ishlash (real-time) atamasi «tez» degani emas, balki «belgilangan muddat ichida kafolatlangan» deganidir. Qattiq real vaqt (hard real-time) tizimlarda muddatni o'tkazib yuborish — tizim nosozligi (avtomobil tormozi, tibbiy qurilma); yumshoq…</a:t>
+              <a:t>Real vaqt rejimida ishlash (real-time) atamasi «tez» degani emas, balki «belgilangan muddat ichida kafolatlangan» deganidir.</a:t>
+            </a:r>
+          </a:p>
+          <a:p>
+            <a:pPr>
+              <a:spcBef>
+                <a:spcPts val="400"/>
+              </a:spcBef>
+            </a:pPr>
+            <a:r>
+              <a:rPr sz="1400">
+                <a:solidFill>
+                  <a:srgbClr val="334055"/>
+                </a:solidFill>
+                <a:latin typeface="Calibri"/>
+              </a:rPr>
+              <a:t>Qattiq real vaqt (hard real-time) tizimlarda muddatni o'tkazib yuborish — tizim nosozligi (avtomobil tormozi, tibbiy qurilma); yumshoq real vaqt (soft real-time) tizimlarda — sifat pasayishi (video kadr tushib qolishi).</a:t>
             </a:r>
           </a:p>
         </p:txBody>
@@ -25886,12 +26534,12 @@
         </p:nvSpPr>
         <p:spPr>
           <a:xfrm>
-            <a:off x="550000" y="4360000"/>
-            <a:ext cx="11100000" cy="1250000"/>
+            <a:off x="550000" y="4636740"/>
+            <a:ext cx="11100000" cy="1503480"/>
           </a:xfrm>
           <a:prstGeom prst="roundRect">
             <a:avLst>
-              <a:gd name="adj" fmla="val 18000"/>
+              <a:gd name="adj" fmla="val 8000"/>
             </a:avLst>
           </a:prstGeom>
           <a:solidFill>
@@ -25932,8 +26580,8 @@
         </p:nvSpPr>
         <p:spPr>
           <a:xfrm>
-            <a:off x="550000" y="4360000"/>
-            <a:ext cx="70000" cy="1250000"/>
+            <a:off x="550000" y="4636740"/>
+            <a:ext cx="70000" cy="1503480"/>
           </a:xfrm>
           <a:prstGeom prst="rect">
             <a:avLst/>
@@ -25976,8 +26624,8 @@
         </p:nvSpPr>
         <p:spPr>
           <a:xfrm>
-            <a:off x="800000" y="4755000"/>
-            <a:ext cx="460000" cy="460000"/>
+            <a:off x="780000" y="5178480"/>
+            <a:ext cx="420000" cy="420000"/>
           </a:xfrm>
           <a:prstGeom prst="ellipse">
             <a:avLst/>
@@ -26010,7 +26658,7 @@
           <a:p>
             <a:pPr algn="ctr"/>
             <a:r>
-              <a:rPr sz="1600" b="1">
+              <a:rPr sz="1400" b="1">
                 <a:solidFill>
                   <a:srgbClr val="FFFFFF"/>
                 </a:solidFill>
@@ -26029,8 +26677,8 @@
         </p:nvSpPr>
         <p:spPr>
           <a:xfrm>
-            <a:off x="1450000" y="4360000"/>
-            <a:ext cx="10050000" cy="1250000"/>
+            <a:off x="1380000" y="4676740"/>
+            <a:ext cx="10150000" cy="1423480"/>
           </a:xfrm>
           <a:prstGeom prst="rect">
             <a:avLst/>
@@ -26038,20 +26686,35 @@
           <a:noFill/>
         </p:spPr>
         <p:txBody>
-          <a:bodyPr wrap="square" anchor="ctr" lIns="50800" rIns="50800">
+          <a:bodyPr wrap="square" anchor="ctr">
             <a:spAutoFit/>
           </a:bodyPr>
           <a:lstStyle/>
           <a:p>
-            <a:pPr algn="l"/>
             <a:r>
-              <a:rPr sz="1600" b="0">
+              <a:rPr sz="1500" b="1">
                 <a:solidFill>
-                  <a:srgbClr val="1B2430"/>
+                  <a:srgbClr val="1F3A5F"/>
                 </a:solidFill>
                 <a:latin typeface="Calibri"/>
               </a:rPr>
-              <a:t>Quvur (pipeline) nuqtai nazaridan inferens — kamera → dekodlash → oldindan qayta ishlash (o'lcham o'zgartirish, normalizatsiya) → model → keyingi qayta ishlash (NMS, kuzatish) → qaror. Ko'pincha modelning o'zi quvur vaqtining yarmidan kamini oladi; qolgani…</a:t>
+              <a:t>Quvur (pipeline) nuqtai nazaridan inferens — kamera → dekodlash → oldindan qayta ishlash (o'lcham o'zgartirish, normalizatsiya) → model → keyingi qayta ishlash (NMS, kuzatish) → qaror.</a:t>
+            </a:r>
+          </a:p>
+          <a:p>
+            <a:pPr>
+              <a:spcBef>
+                <a:spcPts val="400"/>
+              </a:spcBef>
+            </a:pPr>
+            <a:r>
+              <a:rPr sz="1400">
+                <a:solidFill>
+                  <a:srgbClr val="334055"/>
+                </a:solidFill>
+                <a:latin typeface="Calibri"/>
+              </a:rPr>
+              <a:t>Ko'pincha modelning o'zi quvur vaqtining yarmidan kamini oladi; qolgani JPEG dekodlash, rang fazosi konvertatsiyasi va CPU–GPU nusxalashga ketadi.</a:t>
             </a:r>
           </a:p>
         </p:txBody>
@@ -28502,12 +29165,12 @@
         </p:nvSpPr>
         <p:spPr>
           <a:xfrm>
-            <a:off x="550000" y="1620000"/>
-            <a:ext cx="11100000" cy="1250000"/>
+            <a:off x="550000" y="1409780"/>
+            <a:ext cx="11100000" cy="1503480"/>
           </a:xfrm>
           <a:prstGeom prst="roundRect">
             <a:avLst>
-              <a:gd name="adj" fmla="val 18000"/>
+              <a:gd name="adj" fmla="val 8000"/>
             </a:avLst>
           </a:prstGeom>
           <a:solidFill>
@@ -28548,8 +29211,8 @@
         </p:nvSpPr>
         <p:spPr>
           <a:xfrm>
-            <a:off x="550000" y="1620000"/>
-            <a:ext cx="70000" cy="1250000"/>
+            <a:off x="550000" y="1409780"/>
+            <a:ext cx="70000" cy="1503480"/>
           </a:xfrm>
           <a:prstGeom prst="rect">
             <a:avLst/>
@@ -28592,8 +29255,8 @@
         </p:nvSpPr>
         <p:spPr>
           <a:xfrm>
-            <a:off x="800000" y="2015000"/>
-            <a:ext cx="460000" cy="460000"/>
+            <a:off x="780000" y="1951520"/>
+            <a:ext cx="420000" cy="420000"/>
           </a:xfrm>
           <a:prstGeom prst="ellipse">
             <a:avLst/>
@@ -28626,7 +29289,7 @@
           <a:p>
             <a:pPr algn="ctr"/>
             <a:r>
-              <a:rPr sz="1600" b="1">
+              <a:rPr sz="1400" b="1">
                 <a:solidFill>
                   <a:srgbClr val="FFFFFF"/>
                 </a:solidFill>
@@ -28645,8 +29308,8 @@
         </p:nvSpPr>
         <p:spPr>
           <a:xfrm>
-            <a:off x="1450000" y="1620000"/>
-            <a:ext cx="10050000" cy="1250000"/>
+            <a:off x="1380000" y="1449780"/>
+            <a:ext cx="10150000" cy="1423480"/>
           </a:xfrm>
           <a:prstGeom prst="rect">
             <a:avLst/>
@@ -28654,20 +29317,35 @@
           <a:noFill/>
         </p:spPr>
         <p:txBody>
-          <a:bodyPr wrap="square" anchor="ctr" lIns="50800" rIns="50800">
+          <a:bodyPr wrap="square" anchor="ctr">
             <a:spAutoFit/>
           </a:bodyPr>
           <a:lstStyle/>
           <a:p>
-            <a:pPr algn="l"/>
             <a:r>
-              <a:rPr sz="1600" b="0">
+              <a:rPr sz="1500" b="1">
                 <a:solidFill>
-                  <a:srgbClr val="1B2430"/>
+                  <a:srgbClr val="1F3A5F"/>
                 </a:solidFill>
                 <a:latin typeface="Calibri"/>
               </a:rPr>
-              <a:t>TinyML — mashinali o'qitish modellarini milliVatt darajasidagi quvvat bilan ishlaydigan mikrokontrollerlarda bajarish yo'nalishi. Tipik maqsad qurilma: Arm Cortex-M4F, 80–200 MHz, 256 KB flesh, 64–320 KB SRAM, suzuvchi nuqtali blok bor, lekin kesh va…</a:t>
+              <a:t>TinyML — mashinali o'qitish modellarini milliVatt darajasidagi quvvat bilan ishlaydigan mikrokontrollerlarda bajarish yo'nalishi.</a:t>
+            </a:r>
+          </a:p>
+          <a:p>
+            <a:pPr>
+              <a:spcBef>
+                <a:spcPts val="400"/>
+              </a:spcBef>
+            </a:pPr>
+            <a:r>
+              <a:rPr sz="1400">
+                <a:solidFill>
+                  <a:srgbClr val="334055"/>
+                </a:solidFill>
+                <a:latin typeface="Calibri"/>
+              </a:rPr>
+              <a:t>Tipik maqsad qurilma: Arm Cortex-M4F, 80–200 MHz, 256 KB flesh, 64–320 KB SRAM, suzuvchi nuqtali blok bor, lekin kesh va operatsion tizim deyarli yo'q.</a:t>
             </a:r>
           </a:p>
         </p:txBody>
@@ -28680,12 +29358,12 @@
         </p:nvSpPr>
         <p:spPr>
           <a:xfrm>
-            <a:off x="550000" y="2990000"/>
-            <a:ext cx="11100000" cy="1250000"/>
+            <a:off x="550000" y="3023260"/>
+            <a:ext cx="11100000" cy="1503480"/>
           </a:xfrm>
           <a:prstGeom prst="roundRect">
             <a:avLst>
-              <a:gd name="adj" fmla="val 18000"/>
+              <a:gd name="adj" fmla="val 8000"/>
             </a:avLst>
           </a:prstGeom>
           <a:solidFill>
@@ -28726,8 +29404,8 @@
         </p:nvSpPr>
         <p:spPr>
           <a:xfrm>
-            <a:off x="550000" y="2990000"/>
-            <a:ext cx="70000" cy="1250000"/>
+            <a:off x="550000" y="3023260"/>
+            <a:ext cx="70000" cy="1503480"/>
           </a:xfrm>
           <a:prstGeom prst="rect">
             <a:avLst/>
@@ -28770,8 +29448,8 @@
         </p:nvSpPr>
         <p:spPr>
           <a:xfrm>
-            <a:off x="800000" y="3385000"/>
-            <a:ext cx="460000" cy="460000"/>
+            <a:off x="780000" y="3565000"/>
+            <a:ext cx="420000" cy="420000"/>
           </a:xfrm>
           <a:prstGeom prst="ellipse">
             <a:avLst/>
@@ -28804,7 +29482,7 @@
           <a:p>
             <a:pPr algn="ctr"/>
             <a:r>
-              <a:rPr sz="1600" b="1">
+              <a:rPr sz="1400" b="1">
                 <a:solidFill>
                   <a:srgbClr val="FFFFFF"/>
                 </a:solidFill>
@@ -28823,8 +29501,8 @@
         </p:nvSpPr>
         <p:spPr>
           <a:xfrm>
-            <a:off x="1450000" y="2990000"/>
-            <a:ext cx="10050000" cy="1250000"/>
+            <a:off x="1380000" y="3063260"/>
+            <a:ext cx="10150000" cy="1423480"/>
           </a:xfrm>
           <a:prstGeom prst="rect">
             <a:avLst/>
@@ -28832,22 +29510,37 @@
           <a:noFill/>
         </p:spPr>
         <p:txBody>
-          <a:bodyPr wrap="square" anchor="ctr" lIns="50800" rIns="50800">
+          <a:bodyPr wrap="square" anchor="ctr">
             <a:spAutoFit/>
           </a:bodyPr>
           <a:lstStyle/>
           <a:p>
-            <a:pPr algn="l"/>
             <a:r>
-              <a:rPr sz="1600" b="0">
+              <a:rPr sz="1500" b="1">
                 <a:solidFill>
-                  <a:srgbClr val="1B2430"/>
+                  <a:srgbClr val="1F3A5F"/>
                 </a:solidFill>
                 <a:latin typeface="Calibri"/>
               </a:rPr>
               <a:t>TinyML'ning texnik asoslari: modellar o'nlab–yuzlab kilobayt (masalan, kalit so'z aniqlovchi DS-CNN ~20–50 KB, odam aniqlash uchun MobileNet-v1 0,25x ~250–300 KB INT8); barcha og'irliklar INT8'ga kvantlangan, hisoblash butun sonli arifmetikada; xotira statik…</a:t>
             </a:r>
           </a:p>
+          <a:p>
+            <a:pPr>
+              <a:spcBef>
+                <a:spcPts val="400"/>
+              </a:spcBef>
+            </a:pPr>
+            <a:r>
+              <a:rPr sz="1400">
+                <a:solidFill>
+                  <a:srgbClr val="334055"/>
+                </a:solidFill>
+                <a:latin typeface="Calibri"/>
+              </a:rPr>
+              <a:t>Arm Ethos-U55/U65 microNPU'lari Cortex-M55 bilan birga INT8 konvolyutsiyani apparat darajasida tezlashtirib, bir xil quvvatda o'nlab marta ko'proq amal bajaradi.</a:t>
+            </a:r>
+          </a:p>
         </p:txBody>
       </p:sp>
       <p:sp>
@@ -28858,12 +29551,12 @@
         </p:nvSpPr>
         <p:spPr>
           <a:xfrm>
-            <a:off x="550000" y="4360000"/>
-            <a:ext cx="11100000" cy="1250000"/>
+            <a:off x="550000" y="4636740"/>
+            <a:ext cx="11100000" cy="1503480"/>
           </a:xfrm>
           <a:prstGeom prst="roundRect">
             <a:avLst>
-              <a:gd name="adj" fmla="val 18000"/>
+              <a:gd name="adj" fmla="val 8000"/>
             </a:avLst>
           </a:prstGeom>
           <a:solidFill>
@@ -28904,8 +29597,8 @@
         </p:nvSpPr>
         <p:spPr>
           <a:xfrm>
-            <a:off x="550000" y="4360000"/>
-            <a:ext cx="70000" cy="1250000"/>
+            <a:off x="550000" y="4636740"/>
+            <a:ext cx="70000" cy="1503480"/>
           </a:xfrm>
           <a:prstGeom prst="rect">
             <a:avLst/>
@@ -28948,8 +29641,8 @@
         </p:nvSpPr>
         <p:spPr>
           <a:xfrm>
-            <a:off x="800000" y="4755000"/>
-            <a:ext cx="460000" cy="460000"/>
+            <a:off x="780000" y="5178480"/>
+            <a:ext cx="420000" cy="420000"/>
           </a:xfrm>
           <a:prstGeom prst="ellipse">
             <a:avLst/>
@@ -28982,7 +29675,7 @@
           <a:p>
             <a:pPr algn="ctr"/>
             <a:r>
-              <a:rPr sz="1600" b="1">
+              <a:rPr sz="1400" b="1">
                 <a:solidFill>
                   <a:srgbClr val="FFFFFF"/>
                 </a:solidFill>
@@ -29001,8 +29694,8 @@
         </p:nvSpPr>
         <p:spPr>
           <a:xfrm>
-            <a:off x="1450000" y="4360000"/>
-            <a:ext cx="10050000" cy="1250000"/>
+            <a:off x="1380000" y="4676740"/>
+            <a:ext cx="10150000" cy="1423480"/>
           </a:xfrm>
           <a:prstGeom prst="rect">
             <a:avLst/>
@@ -29010,20 +29703,19 @@
           <a:noFill/>
         </p:spPr>
         <p:txBody>
-          <a:bodyPr wrap="square" anchor="ctr" lIns="50800" rIns="50800">
+          <a:bodyPr wrap="square" anchor="ctr">
             <a:spAutoFit/>
           </a:bodyPr>
           <a:lstStyle/>
           <a:p>
-            <a:pPr algn="l"/>
             <a:r>
-              <a:rPr sz="1600" b="0">
+              <a:rPr sz="1400" b="0">
                 <a:solidFill>
                   <a:srgbClr val="1B2430"/>
                 </a:solidFill>
                 <a:latin typeface="Calibri"/>
               </a:rPr>
-              <a:t>TinyML loyihasida muhandis quyidagi balansni ushlab turadi: model aniqligi, flesh hajmi (model + kod), SRAM (arena + aktivatsiyalar), inferens vaqti (davomiylik va chastota orqali energiya) va batareya umri. Masalan, 1 mJ/inferens sarflaydigan model sekundiga…</a:t>
+              <a:t>TinyML loyihasida muhandis quyidagi balansni ushlab turadi: model aniqligi, flesh hajmi (model + kod), SRAM (arena + aktivatsiyalar), inferens vaqti (davomiylik va chastota orqali energiya) va batareya umri.</a:t>
             </a:r>
           </a:p>
         </p:txBody>
